--- a/etapa1/relatorio/PGP-2627-G12-E1-apresentacao.pptx
+++ b/etapa1/relatorio/PGP-2627-G12-E1-apresentacao.pptx
@@ -119,42 +119,42 @@
   <p:extLst>
     <p:ext uri="{521415D9-36F7-43E2-AB2F-B90AF26B5E84}">
       <p14:sectionLst xmlns:p14="http://schemas.microsoft.com/office/powerpoint/2010/main">
-        <p14:section name="Abertura" id="{127363a4-1fba-f264-c725-fefaf3d95d74}">
+        <p14:section name="Abertura" id="{6f6ed963-baa9-da0a-5b66-06c615b5dcaf}">
           <p14:sldIdLst>
             <p14:sldId id="256"/>
           </p14:sldIdLst>
         </p14:section>
-        <p14:section name="Casos de uso" id="{18d383b9-453b-c0e6-a8d3-dfb41f033e54}">
+        <p14:section name="Casos de uso" id="{4b44482e-1545-cdcc-6396-450ad47d727a}">
           <p14:sldIdLst>
             <p14:sldId id="257"/>
             <p14:sldId id="258"/>
           </p14:sldIdLst>
         </p14:section>
-        <p14:section name="Modelo de dados" id="{a95a25f2-482d-1fc7-dc09-71f3852a3bc9}">
+        <p14:section name="Modelo de dados" id="{0512a545-cf29-856b-27ca-9ecf8d6ab5b5}">
           <p14:sldIdLst>
             <p14:sldId id="259"/>
             <p14:sldId id="260"/>
           </p14:sldIdLst>
         </p14:section>
-        <p14:section name="Restrições e serviços" id="{3bfe0ad6-e719-e29b-7868-e7580629837b}">
+        <p14:section name="Restrições e serviços" id="{5d09e1ba-6e42-ecd1-3153-3f61f1ce953f}">
           <p14:sldIdLst>
             <p14:sldId id="261"/>
             <p14:sldId id="262"/>
           </p14:sldIdLst>
         </p14:section>
-        <p14:section name="Fluxos" id="{ac747404-6e4b-51cd-15c2-15b63a99ef1d}">
+        <p14:section name="Fluxos" id="{ddd421d8-0247-c016-1bf0-e2dbf65bcb72}">
           <p14:sldIdLst>
             <p14:sldId id="263"/>
             <p14:sldId id="264"/>
           </p14:sldIdLst>
         </p14:section>
-        <p14:section name="Esboços" id="{98c8df30-4037-462b-7503-dae834efe33c}">
+        <p14:section name="Esboços" id="{716d1cb9-bdf2-bc9a-0f40-a3f27ff95f44}">
           <p14:sldIdLst>
             <p14:sldId id="265"/>
             <p14:sldId id="266"/>
           </p14:sldIdLst>
         </p14:section>
-        <p14:section name="Fecho" id="{9151e69a-eba4-67ff-4cd1-06433f0fdaf0}">
+        <p14:section name="Fecho" id="{55b2cd84-5e82-d8a2-0a0c-fd00f6d27c43}">
           <p14:sldIdLst>
             <p14:sldId id="267"/>
             <p14:sldId id="268"/>
@@ -1092,7 +1092,7 @@
           <a:p>
             <a:r>
               <a:rPr lang="en-US" dirty="0"/>
-              <a:t>Reis: o utilizador tem 16 casos de uso, o gestor 6, e o 'Iniciar sessão' é comum. User stories sobre os mesmos dados foram agrupadas (ex.: Gerir coleção = US10 + US11). Única relação: Gerir artista favorito «extend» Visualizar página de artista.</a:t>
+              <a:t>Reis: o utilizador tem 16 casos de uso, o gestor 7; 'Iniciar sessão' e 'Visualizar página de álbum' são comuns. User stories sobre os mesmos dados foram agrupadas (ex.: Gerir coleção = US10 + US11). Duas relações «extend»: Gerir artista favorito estende Visualizar página de artista, e Gerir stock estende Visualizar página de álbum (o gestor altera o stock a partir dessa página, US25 a).</a:t>
             </a:r>
             <a:endParaRPr lang="en-US" dirty="0"/>
           </a:p>
@@ -1356,7 +1356,7 @@
           <a:p>
             <a:r>
               <a:rPr lang="en-US" dirty="0"/>
-              <a:t>Ze: as 30 restrições do enunciado estão nas notas dos diagramas. Encontrámos mais 17 lendo os critérios de aceitação das user stories — nenhuma foi inventada, cada uma tem a frase de origem. Exemplos na tabela.</a:t>
+              <a:t>Ze: as 30 restrições do enunciado estão nas notas dos diagramas. Encontrámos mais 21 lendo os critérios de aceitação das user stories — nenhuma foi inventada, cada uma tem a frase de origem. Exemplos na tabela.</a:t>
             </a:r>
             <a:endParaRPr lang="en-US" dirty="0"/>
           </a:p>
@@ -1532,7 +1532,7 @@
           <a:p>
             <a:r>
               <a:rPr lang="en-US" dirty="0"/>
-              <a:t>Edson: a compra tem um diagrama de alto nível (pesquisa → carrinho → pagar) e o pagamento está decomposto numa subatividade, como pede o enunciado. Raias: utilizador, aplicação, serviço de pagamentos.</a:t>
+              <a:t>Edson: a compra tem um diagrama de alto nível (pesquisa → carrinho → pagar) e o pagamento está decomposto numa subatividade, como pede o enunciado. Raias: utilizador, aplicação, serviço de pagamentos. Notação UML: decisões em losango com guardas [ ], barras de fork/join. A reserva das unidades resolve o caso de dois utilizadores a comprarem a última unidade ao mesmo tempo.</a:t>
             </a:r>
             <a:endParaRPr lang="en-US" dirty="0"/>
           </a:p>
@@ -4738,7 +4738,7 @@
                 <a:ea typeface="Cambria" pitchFamily="34" charset="-122"/>
                 <a:cs typeface="Cambria" pitchFamily="34" charset="-120"/>
               </a:rPr>
-              <a:t>3</a:t>
+              <a:t>5</a:t>
             </a:r>
             <a:endParaRPr lang="en-US" sz="6000" dirty="0"/>
           </a:p>
@@ -5021,8 +5021,8 @@
         </p:blipFill>
         <p:spPr>
           <a:xfrm>
-            <a:off x="4754880" y="1504111"/>
-            <a:ext cx="4023360" cy="2386739"/>
+            <a:off x="4899074" y="1463040"/>
+            <a:ext cx="3734972" cy="2468880"/>
           </a:xfrm>
           <a:prstGeom prst="rect">
             <a:avLst/>
@@ -5322,8 +5322,8 @@
         </p:blipFill>
         <p:spPr>
           <a:xfrm>
-            <a:off x="809733" y="1371600"/>
-            <a:ext cx="10542054" cy="4297680"/>
+            <a:off x="2931965" y="1371600"/>
+            <a:ext cx="6297590" cy="4297680"/>
           </a:xfrm>
           <a:prstGeom prst="rect">
             <a:avLst/>
@@ -5605,8 +5605,8 @@
         </p:blipFill>
         <p:spPr>
           <a:xfrm>
-            <a:off x="548640" y="1710464"/>
-            <a:ext cx="4206240" cy="4260032"/>
+            <a:off x="638057" y="1371600"/>
+            <a:ext cx="4027406" cy="4937760"/>
           </a:xfrm>
           <a:prstGeom prst="rect">
             <a:avLst/>
@@ -6418,7 +6418,7 @@
                 <a:ea typeface="Cambria" pitchFamily="34" charset="-122"/>
                 <a:cs typeface="Cambria" pitchFamily="34" charset="-120"/>
               </a:rPr>
-              <a:t>+17</a:t>
+              <a:t>+21</a:t>
             </a:r>
             <a:endParaRPr lang="en-US" sz="6000" dirty="0"/>
           </a:p>
@@ -7586,7 +7586,7 @@
                   <a:schemeClr val="tx2"/>
                 </a:solidFill>
               </a:rPr>
-              <a:t>Todas as 47 restrições estão associadas a uma classe do modelo (Anexo A do relatório).</a:t>
+              <a:t>Todas as 51 restrições estão associadas a uma classe do modelo (Anexo A do relatório).</a:t>
             </a:r>
             <a:endParaRPr lang="en-US" sz="1400" dirty="0"/>
           </a:p>
@@ -8220,6 +8220,53 @@
       </p:sp>
       <p:sp>
         <p:nvSpPr>
+          <p:cNvPr id="18" name="outros-servicos"/>
+          <p:cNvSpPr txBox="1"/>
+          <p:nvPr/>
+        </p:nvSpPr>
+        <p:spPr>
+          <a:xfrm>
+            <a:off x="548640" y="5303520"/>
+            <a:ext cx="11064240" cy="548640"/>
+          </a:xfrm>
+          <a:prstGeom prst="rect">
+            <a:avLst/>
+          </a:prstGeom>
+          <a:noFill/>
+          <a:ln/>
+        </p:spPr>
+        <p:txBody>
+          <a:bodyPr wrap="square" lIns="0" tIns="0" rIns="0" bIns="0" rtlCol="0" anchor="ctr"/>
+          <a:lstStyle/>
+          <a:p>
+            <a:pPr indent="0" marL="0">
+              <a:buNone/>
+            </a:pPr>
+            <a:r>
+              <a:rPr lang="en-US" sz="1500" b="1" dirty="0">
+                <a:solidFill>
+                  <a:schemeClr val="tx1"/>
+                </a:solidFill>
+              </a:rPr>
+              <a:t>Também pesquisados: </a:t>
+            </a:r>
+            <a:pPr indent="0" marL="0">
+              <a:buNone/>
+            </a:pPr>
+            <a:r>
+              <a:rPr lang="en-US" sz="1500" dirty="0">
+                <a:solidFill>
+                  <a:schemeClr val="tx1"/>
+                </a:solidFill>
+              </a:rPr>
+              <a:t>imagens de capa no Cloudinary, com sugestão do Cover Art Archive pelo MBID; faixas e canções importadas da API do MusicBrainz (dados CC0).</a:t>
+            </a:r>
+            <a:endParaRPr lang="en-US" sz="1500" dirty="0"/>
+          </a:p>
+        </p:txBody>
+      </p:sp>
+      <p:sp>
+        <p:nvSpPr>
           <p:cNvPr id="25" name="Slide Number Placeholder 0"/>
           <p:cNvSpPr>
             <a:spLocks noGrp="1"/>
@@ -8428,8 +8475,8 @@
         </p:blipFill>
         <p:spPr>
           <a:xfrm>
-            <a:off x="818599" y="1280160"/>
-            <a:ext cx="2751921" cy="5074920"/>
+            <a:off x="573534" y="1280160"/>
+            <a:ext cx="3242052" cy="5074920"/>
           </a:xfrm>
           <a:prstGeom prst="rect">
             <a:avLst/>
@@ -8534,7 +8581,7 @@
                   <a:schemeClr val="tx1"/>
                 </a:solidFill>
               </a:rPr>
-              <a:t>O utilizador escolhe Stripe ou PayPal e paga na página do serviço</a:t>
+              <a:t>Reserva as unidades; se uma versão esgotou entretanto, sai do carrinho</a:t>
             </a:r>
             <a:endParaRPr lang="en-US" sz="1500" dirty="0"/>
           </a:p>
@@ -8631,7 +8678,7 @@
                   <a:schemeClr val="tx1"/>
                 </a:solidFill>
               </a:rPr>
-              <a:t>A aplicação espera pelo resultado enviado pelo serviço (US28 c)</a:t>
+              <a:t>O utilizador escolhe Stripe ou PayPal e paga na página do serviço</a:t>
             </a:r>
             <a:endParaRPr lang="en-US" sz="1500" dirty="0"/>
           </a:p>
@@ -8728,7 +8775,7 @@
                   <a:schemeClr val="tx1"/>
                 </a:solidFill>
               </a:rPr>
-              <a:t>Sucesso: fatura, coleção atualizada e stock descontado</a:t>
+              <a:t>Espera pelo resultado (US28 c); sem resposta no tempo limite, liberta a reserva</a:t>
             </a:r>
             <a:endParaRPr lang="en-US" sz="1500" dirty="0"/>
           </a:p>
@@ -8825,7 +8872,7 @@
                   <a:schemeClr val="tx1"/>
                 </a:solidFill>
               </a:rPr>
-              <a:t>Última unidade vendida: regista a data da última venda (RI-17)</a:t>
+              <a:t>Sucesso: emite a fatura; coleção e stock atualizados em paralelo (fork/join)</a:t>
             </a:r>
             <a:endParaRPr lang="en-US" sz="1500" dirty="0"/>
           </a:p>
@@ -9138,8 +9185,8 @@
         </p:blipFill>
         <p:spPr>
           <a:xfrm>
-            <a:off x="761002" y="1280160"/>
-            <a:ext cx="3232875" cy="5074920"/>
+            <a:off x="589844" y="1280160"/>
+            <a:ext cx="3575193" cy="5074920"/>
           </a:xfrm>
           <a:prstGeom prst="rect">
             <a:avLst/>

--- a/etapa1/relatorio/PGP-2627-G12-E1-apresentacao.pptx
+++ b/etapa1/relatorio/PGP-2627-G12-E1-apresentacao.pptx
@@ -18,9 +18,10 @@
     <p:sldId id="266" r:id="rId12"/>
     <p:sldId id="267" r:id="rId13"/>
     <p:sldId id="268" r:id="rId14"/>
+    <p:sldId id="269" r:id="rId15"/>
   </p:sldIdLst>
   <p:notesMasterIdLst>
-    <p:notesMasterId r:id="rId15"/>
+    <p:notesMasterId r:id="rId16"/>
   </p:notesMasterIdLst>
   <p:sldSz cx="12192000" cy="6858000"/>
   <p:notesSz cx="6858000" cy="12192000"/>
@@ -119,45 +120,46 @@
   <p:extLst>
     <p:ext uri="{521415D9-36F7-43E2-AB2F-B90AF26B5E84}">
       <p14:sectionLst xmlns:p14="http://schemas.microsoft.com/office/powerpoint/2010/main">
-        <p14:section name="Abertura" id="{6f6ed963-baa9-da0a-5b66-06c615b5dcaf}">
+        <p14:section name="Abertura" id="{526912e7-a50f-e291-d570-cbb5f859e742}">
           <p14:sldIdLst>
             <p14:sldId id="256"/>
           </p14:sldIdLst>
         </p14:section>
-        <p14:section name="Casos de uso" id="{4b44482e-1545-cdcc-6396-450ad47d727a}">
+        <p14:section name="Casos de uso" id="{7d080c08-d368-e83a-e843-5bc50a0bfcdf}">
           <p14:sldIdLst>
             <p14:sldId id="257"/>
             <p14:sldId id="258"/>
+            <p14:sldId id="259"/>
           </p14:sldIdLst>
         </p14:section>
-        <p14:section name="Modelo de dados" id="{0512a545-cf29-856b-27ca-9ecf8d6ab5b5}">
+        <p14:section name="Modelo de dados" id="{f6b7a814-33ee-9d07-6f42-6767f3e843aa}">
           <p14:sldIdLst>
-            <p14:sldId id="259"/>
             <p14:sldId id="260"/>
+            <p14:sldId id="261"/>
           </p14:sldIdLst>
         </p14:section>
-        <p14:section name="Restrições e serviços" id="{5d09e1ba-6e42-ecd1-3153-3f61f1ce953f}">
+        <p14:section name="Restrições e serviços" id="{796c342c-0e86-8a32-fa93-e84db565b408}">
           <p14:sldIdLst>
-            <p14:sldId id="261"/>
             <p14:sldId id="262"/>
+            <p14:sldId id="263"/>
           </p14:sldIdLst>
         </p14:section>
-        <p14:section name="Fluxos" id="{ddd421d8-0247-c016-1bf0-e2dbf65bcb72}">
+        <p14:section name="Fluxos" id="{1f7c6050-c200-9c9d-dea6-3250702560c1}">
           <p14:sldIdLst>
-            <p14:sldId id="263"/>
             <p14:sldId id="264"/>
+            <p14:sldId id="265"/>
           </p14:sldIdLst>
         </p14:section>
-        <p14:section name="Esboços" id="{716d1cb9-bdf2-bc9a-0f40-a3f27ff95f44}">
+        <p14:section name="Esboços" id="{58a783e1-fa44-d924-2a29-0b75b96793c3}">
           <p14:sldIdLst>
-            <p14:sldId id="265"/>
             <p14:sldId id="266"/>
+            <p14:sldId id="267"/>
           </p14:sldIdLst>
         </p14:section>
-        <p14:section name="Fecho" id="{55b2cd84-5e82-d8a2-0a0c-fd00f6d27c43}">
+        <p14:section name="Fecho" id="{72744c76-51c2-bb6a-1a5b-7074936eaeaa}">
           <p14:sldIdLst>
-            <p14:sldId id="267"/>
             <p14:sldId id="268"/>
+            <p14:sldId id="269"/>
           </p14:sldIdLst>
         </p14:section>
       </p14:sectionLst>
@@ -652,7 +654,7 @@
           <a:p>
             <a:r>
               <a:rPr lang="en-US" dirty="0"/>
-              <a:t>Miguel: fizemos 12 esboços de baixa fidelidade; este é o mais complexo. Os botões 'Coleção' e 'Carrinho' atuam sobre a versão; 'Adicionar a uma lista' atua sobre o álbum.</a:t>
+              <a:t>Edson: este fluxo junta quatro user stories e três atores. Se aceite, a versão aparece logo na página do álbum e o utilizador pode adicioná-la à coleção. Há mais dois fluxos no relatório: criar conta/iniciar sessão e gerir o catálogo.</a:t>
             </a:r>
             <a:endParaRPr lang="en-US" dirty="0"/>
           </a:p>
@@ -740,7 +742,7 @@
           <a:p>
             <a:r>
               <a:rPr lang="en-US" dirty="0"/>
-              <a:t>Miguel: no carrinho os itens mais recentes aparecem primeiro; ao pagar escolhe-se o serviço e aparecem mensagens de sucesso ou falha. À direita a versão para telemóvel (RNF-04): tabelas passam a cartões e o botão Pagar fica fixo no fundo.</a:t>
+              <a:t>Miguel: fizemos 12 esboços de baixa fidelidade; este é o mais complexo. Os botões 'Coleção' e 'Carrinho' atuam sobre a versão; 'Adicionar a uma lista' atua sobre o álbum.</a:t>
             </a:r>
             <a:endParaRPr lang="en-US" dirty="0"/>
           </a:p>
@@ -828,7 +830,7 @@
           <a:p>
             <a:r>
               <a:rPr lang="en-US" dirty="0"/>
-              <a:t>Reis: mostrar que lemos o enunciado com atenção — encontrámos pontos ambíguos, perguntámos ao professor e documentámos o que assumimos.</a:t>
+              <a:t>Miguel: no carrinho os itens mais recentes aparecem primeiro; ao pagar escolhe-se o serviço e aparecem mensagens de sucesso ou falha. À direita a versão para telemóvel (RNF-04): tabelas passam a cartões e o botão Pagar fica fixo no fundo.</a:t>
             </a:r>
             <a:endParaRPr lang="en-US" dirty="0"/>
           </a:p>
@@ -916,7 +918,7 @@
           <a:p>
             <a:r>
               <a:rPr lang="en-US" dirty="0"/>
-              <a:t>Todos: perguntas. Cada pessoa responde sobre a sua parte.</a:t>
+              <a:t>Reis: mostrar que lemos o enunciado com atenção — encontrámos pontos ambíguos, perguntámos ao professor e documentámos o que assumimos.</a:t>
             </a:r>
             <a:endParaRPr lang="en-US" dirty="0"/>
           </a:p>
@@ -940,6 +942,94 @@
             <a:fld id="{F7021451-1387-4CA6-816F-3879F97B5CBC}" type="slidenum">
               <a:rPr lang="en-US"/>
               <a:t>13</a:t>
+            </a:fld>
+            <a:endParaRPr lang="en-US"/>
+          </a:p>
+        </p:txBody>
+      </p:sp>
+    </p:spTree>
+    <p:extLst>
+      <p:ext uri="{BB962C8B-B14F-4D97-AF65-F5344CB8AC3E}">
+        <p14:creationId xmlns:p14="http://schemas.microsoft.com/office/powerpoint/2010/main" val="1024086991"/>
+      </p:ext>
+    </p:extLst>
+  </p:cSld>
+  <p:clrMapOvr>
+    <a:masterClrMapping/>
+  </p:clrMapOvr>
+</p:notes>
+</file>
+
+<file path=ppt/notesSlides/notesSlide14.xml><?xml version="1.0" encoding="utf-8"?>
+<p:notes xmlns:a="http://schemas.openxmlformats.org/drawingml/2006/main" xmlns:r="http://schemas.openxmlformats.org/officeDocument/2006/relationships" xmlns:p="http://schemas.openxmlformats.org/presentationml/2006/main">
+  <p:cSld>
+    <p:spTree>
+      <p:nvGrpSpPr>
+        <p:cNvPr id="1" name=""/>
+        <p:cNvGrpSpPr/>
+        <p:nvPr/>
+      </p:nvGrpSpPr>
+      <p:grpSpPr>
+        <a:xfrm>
+          <a:off x="0" y="0"/>
+          <a:ext cx="0" cy="0"/>
+          <a:chOff x="0" y="0"/>
+          <a:chExt cx="0" cy="0"/>
+        </a:xfrm>
+      </p:grpSpPr>
+      <p:sp>
+        <p:nvSpPr>
+          <p:cNvPr id="2" name="Slide Image Placeholder 1"/>
+          <p:cNvSpPr>
+            <a:spLocks noGrp="1" noRot="1" noChangeAspect="1"/>
+          </p:cNvSpPr>
+          <p:nvPr>
+            <p:ph type="sldImg"/>
+          </p:nvPr>
+        </p:nvSpPr>
+        <p:spPr/>
+      </p:sp>
+      <p:sp>
+        <p:nvSpPr>
+          <p:cNvPr id="3" name="Notes Placeholder 2"/>
+          <p:cNvSpPr>
+            <a:spLocks noGrp="1"/>
+          </p:cNvSpPr>
+          <p:nvPr>
+            <p:ph type="body" idx="1"/>
+          </p:nvPr>
+        </p:nvSpPr>
+        <p:spPr/>
+        <p:txBody>
+          <a:bodyPr/>
+          <a:lstStyle/>
+          <a:p>
+            <a:r>
+              <a:rPr lang="en-US" dirty="0"/>
+              <a:t>Todos: perguntas. Cada pessoa responde sobre a sua parte.</a:t>
+            </a:r>
+            <a:endParaRPr lang="en-US" dirty="0"/>
+          </a:p>
+        </p:txBody>
+      </p:sp>
+      <p:sp>
+        <p:nvSpPr>
+          <p:cNvPr id="4" name="Slide Number Placeholder 3"/>
+          <p:cNvSpPr>
+            <a:spLocks noGrp="1"/>
+          </p:cNvSpPr>
+          <p:nvPr>
+            <p:ph type="sldNum" sz="quarter" idx="10"/>
+          </p:nvPr>
+        </p:nvSpPr>
+        <p:spPr/>
+        <p:txBody>
+          <a:bodyPr/>
+          <a:lstStyle/>
+          <a:p>
+            <a:fld id="{F7021451-1387-4CA6-816F-3879F97B5CBC}" type="slidenum">
+              <a:rPr lang="en-US"/>
+              <a:t>14</a:t>
             </a:fld>
             <a:endParaRPr lang="en-US"/>
           </a:p>
@@ -1092,7 +1182,7 @@
           <a:p>
             <a:r>
               <a:rPr lang="en-US" dirty="0"/>
-              <a:t>Reis: o utilizador tem 16 casos de uso, o gestor 7; 'Iniciar sessão' e 'Visualizar página de álbum' são comuns. User stories sobre os mesmos dados foram agrupadas (ex.: Gerir coleção = US10 + US11). Duas relações «extend»: Gerir artista favorito estende Visualizar página de artista, e Gerir stock estende Visualizar página de álbum (o gestor altera o stock a partir dessa página, US25 a).</a:t>
+              <a:t>Reis: o enunciado não dá volumes nem tempos, por isso a equipa assumiu valores (são estimativas, a confirmar com o cliente) que servem de referência às RNF-08 e RNF-10. Porquê Scrum: cliente participativo com demonstrações em cada sprint, equipa de 5, requisitos que podem mudar e um semestre com 3 sprints de cerca de um mês. A cascata não serve porque exige requisitos estáveis e só entrega no fim. O gestor de projeto faz parcialmente de Product Owner: ordena as user stories e distribui-as pelos sprints.</a:t>
             </a:r>
             <a:endParaRPr lang="en-US" dirty="0"/>
           </a:p>
@@ -1180,7 +1270,7 @@
           <a:p>
             <a:r>
               <a:rPr lang="en-US" dirty="0"/>
-              <a:t>Rodrigo: diagrama de topo, só classes e associações, com uma cor por grupo (catálogo azul, loja verde, utilizadores amarelo, coleções roxo, pedidos vermelho). Sublinhar que a VersaoAlbum é o centro do modelo.</a:t>
+              <a:t>Reis: o utilizador tem 16 casos de uso, o gestor 7; 'Iniciar sessão' e 'Visualizar página de álbum' são comuns. User stories sobre os mesmos dados foram agrupadas (ex.: Gerir coleção = US10 + US11). Duas relações «extend»: Gerir artista favorito estende Visualizar página de artista, e Gerir stock estende Visualizar página de álbum (o gestor altera o stock a partir dessa página, US25 a).</a:t>
             </a:r>
             <a:endParaRPr lang="en-US" dirty="0"/>
           </a:p>
@@ -1268,7 +1358,7 @@
           <a:p>
             <a:r>
               <a:rPr lang="en-US" dirty="0"/>
-              <a:t>Rodrigo: explicar as quatro decisões. Exemplo do enunciado: 'Last Resort' está no 'Infest' e no 'Now 4' — por isso a Faixa é uma classe. Se perguntarem pelo preço na fatura: guarda-se o preço pago porque o preço na loja pode mudar.</a:t>
+              <a:t>Rodrigo: diagrama de topo, só classes e associações, com uma cor por grupo (catálogo azul, loja verde, utilizadores amarelo, coleções roxo, pedidos vermelho). Sublinhar que a VersaoAlbum é o centro do modelo.</a:t>
             </a:r>
             <a:endParaRPr lang="en-US" dirty="0"/>
           </a:p>
@@ -1356,7 +1446,7 @@
           <a:p>
             <a:r>
               <a:rPr lang="en-US" dirty="0"/>
-              <a:t>Ze: as 30 restrições do enunciado estão nas notas dos diagramas. Encontrámos mais 21 lendo os critérios de aceitação das user stories — nenhuma foi inventada, cada uma tem a frase de origem. Exemplos na tabela.</a:t>
+              <a:t>Rodrigo: explicar as quatro decisões. Exemplo do enunciado: 'Last Resort' está no 'Infest' e no 'Now 4' — por isso a Faixa é uma classe. Se perguntarem pelo preço na fatura: guarda-se o preço pago porque o preço na loja pode mudar.</a:t>
             </a:r>
             <a:endParaRPr lang="en-US" dirty="0"/>
           </a:p>
@@ -1444,7 +1534,7 @@
           <a:p>
             <a:r>
               <a:rPr lang="en-US" dirty="0"/>
-              <a:t>Ze: cada escolha foi comparada com concorrentes, com preços consultados a 27/out/2026. Argumento principal do Nominatim: o modelo guarda as coordenadas na Morada, e Google/Mapbox restringem ou cobram isso. Dois serviços de pagamento porque a US28 b) pede escolha.</a:t>
+              <a:t>Ze: as 30 restrições do enunciado estão nas notas dos diagramas. Encontrámos mais 21 lendo os critérios de aceitação das user stories — nenhuma foi inventada, cada uma tem a frase de origem. Exemplos na tabela.</a:t>
             </a:r>
             <a:endParaRPr lang="en-US" dirty="0"/>
           </a:p>
@@ -1532,7 +1622,7 @@
           <a:p>
             <a:r>
               <a:rPr lang="en-US" dirty="0"/>
-              <a:t>Edson: a compra tem um diagrama de alto nível (pesquisa → carrinho → pagar) e o pagamento está decomposto numa subatividade, como pede o enunciado. Raias: utilizador, aplicação, serviço de pagamentos. Notação UML: decisões em losango com guardas [ ], barras de fork/join. A reserva das unidades resolve o caso de dois utilizadores a comprarem a última unidade ao mesmo tempo.</a:t>
+              <a:t>Ze: cada escolha foi comparada com concorrentes, com preços consultados a 27/out/2026. Argumento principal do Nominatim: o modelo guarda as coordenadas na Morada, e Google/Mapbox restringem ou cobram isso. Dois serviços de pagamento porque a US28 b) pede escolha.</a:t>
             </a:r>
             <a:endParaRPr lang="en-US" dirty="0"/>
           </a:p>
@@ -1620,7 +1710,7 @@
           <a:p>
             <a:r>
               <a:rPr lang="en-US" dirty="0"/>
-              <a:t>Edson: este fluxo junta quatro user stories e três atores. Se aceite, a versão aparece logo na página do álbum e o utilizador pode adicioná-la à coleção. Há mais dois fluxos no relatório: criar conta/iniciar sessão e gerir o catálogo.</a:t>
+              <a:t>Edson: a compra tem um diagrama de alto nível (pesquisa → carrinho → pagar) e o pagamento está decomposto numa subatividade, como pede o enunciado. Raias: utilizador, aplicação, serviço de pagamentos. Notação UML: decisões em losango com guardas [ ], barras de fork/join. A reserva das unidades resolve o caso de dois utilizadores a comprarem a última unidade ao mesmo tempo.</a:t>
             </a:r>
             <a:endParaRPr lang="en-US" dirty="0"/>
           </a:p>
@@ -2570,7 +2660,7 @@
                   <a:schemeClr val="tx1"/>
                 </a:solidFill>
               </a:rPr>
-              <a:t>Página de álbum: cinco user stories num ecrã</a:t>
+              <a:t>Pedido de nova versão: três atores</a:t>
             </a:r>
             <a:endParaRPr lang="en-US" sz="3200" dirty="0"/>
           </a:p>
@@ -2656,7 +2746,7 @@
                   <a:schemeClr val="tx2"/>
                 </a:solidFill>
               </a:rPr>
-              <a:t>Miguel</a:t>
+              <a:t>Edson</a:t>
             </a:r>
             <a:endParaRPr lang="en-US" sz="1200" dirty="0"/>
           </a:p>
@@ -2664,7 +2754,7 @@
       </p:sp>
       <p:pic>
         <p:nvPicPr>
-          <p:cNvPr id="6" name="esboco-album" descr="C:\Users\rodri\Desktop\PGP\etapa1\esbocos\img\E01-pagina-album.png">    </p:cNvPr>
+          <p:cNvPr id="6" name="diagrama-pedido" descr="C:\Users\rodri\Desktop\PGP\etapa1\atividades\img\02-pedido-nova-versao.png">    </p:cNvPr>
           <p:cNvPicPr>
             <a:picLocks noChangeAspect="1"/>
           </p:cNvPicPr>
@@ -2678,8 +2768,8 @@
         </p:blipFill>
         <p:spPr>
           <a:xfrm>
-            <a:off x="1095890" y="1371600"/>
-            <a:ext cx="6403579" cy="4937760"/>
+            <a:off x="589844" y="1280160"/>
+            <a:ext cx="3575193" cy="5074920"/>
           </a:xfrm>
           <a:prstGeom prst="rect">
             <a:avLst/>
@@ -2695,14 +2785,39 @@
       </p:pic>
       <p:sp>
         <p:nvSpPr>
-          <p:cNvPr id="7" name="Text 4"/>
+          <p:cNvPr id="7" name="passo"/>
+          <p:cNvSpPr/>
+          <p:nvPr/>
+        </p:nvSpPr>
+        <p:spPr>
+          <a:xfrm>
+            <a:off x="4663440" y="1737360"/>
+            <a:ext cx="457200" cy="457200"/>
+          </a:xfrm>
+          <a:prstGeom prst="ellipse">
+            <a:avLst/>
+          </a:prstGeom>
+          <a:solidFill>
+            <a:schemeClr val="accent1"/>
+          </a:solidFill>
+          <a:ln w="12700">
+            <a:solidFill>
+              <a:schemeClr val="accent1"/>
+            </a:solidFill>
+            <a:prstDash val="solid"/>
+          </a:ln>
+        </p:spPr>
+      </p:sp>
+      <p:sp>
+        <p:nvSpPr>
+          <p:cNvPr id="8" name="Text 5"/>
           <p:cNvSpPr txBox="1"/>
           <p:nvPr/>
         </p:nvSpPr>
         <p:spPr>
           <a:xfrm>
-            <a:off x="8321040" y="1554480"/>
-            <a:ext cx="3291840" cy="4572000"/>
+            <a:off x="4663440" y="1737360"/>
+            <a:ext cx="457200" cy="457200"/>
           </a:xfrm>
           <a:prstGeom prst="rect">
             <a:avLst/>
@@ -2711,15 +2826,47 @@
           <a:ln/>
         </p:spPr>
         <p:txBody>
-          <a:bodyPr wrap="square" lIns="0" tIns="0" rIns="0" bIns="0" rtlCol="0" anchor="t"/>
-          <a:lstStyle/>
-          <a:p>
-            <a:pPr marL="342900" indent="-342900">
-              <a:spcAft>
-                <a:spcPts val="1200"/>
-              </a:spcAft>
-              <a:buSzPct val="100000"/>
-              <a:buChar char="•"/>
+          <a:bodyPr wrap="square" lIns="0" tIns="0" rIns="0" bIns="0" rtlCol="0" anchor="ctr"/>
+          <a:lstStyle/>
+          <a:p>
+            <a:pPr algn="ctr" indent="0" marL="0">
+              <a:buNone/>
+            </a:pPr>
+            <a:r>
+              <a:rPr lang="en-US" sz="1600" b="1" dirty="0">
+                <a:solidFill>
+                  <a:schemeClr val="bg1"/>
+                </a:solidFill>
+              </a:rPr>
+              <a:t>1</a:t>
+            </a:r>
+            <a:endParaRPr lang="en-US" sz="1600" dirty="0"/>
+          </a:p>
+        </p:txBody>
+      </p:sp>
+      <p:sp>
+        <p:nvSpPr>
+          <p:cNvPr id="9" name="Text 6"/>
+          <p:cNvSpPr txBox="1"/>
+          <p:nvPr/>
+        </p:nvSpPr>
+        <p:spPr>
+          <a:xfrm>
+            <a:off x="5303520" y="1691640"/>
+            <a:ext cx="6309360" cy="548640"/>
+          </a:xfrm>
+          <a:prstGeom prst="rect">
+            <a:avLst/>
+          </a:prstGeom>
+          <a:noFill/>
+          <a:ln/>
+        </p:spPr>
+        <p:txBody>
+          <a:bodyPr wrap="square" lIns="0" tIns="0" rIns="0" bIns="0" rtlCol="0" anchor="ctr"/>
+          <a:lstStyle/>
+          <a:p>
+            <a:pPr indent="0" marL="0">
+              <a:buNone/>
             </a:pPr>
             <a:r>
               <a:rPr lang="en-US" sz="1500" dirty="0">
@@ -2727,17 +2874,96 @@
                   <a:schemeClr val="tx1"/>
                 </a:solidFill>
               </a:rPr>
-              <a:t>Uma linha por versão, com o estado na loja: disponível, esgotada ou nunca vendida</a:t>
+              <a:t>O utilizador pede uma versão nova de um álbum (US12)</a:t>
             </a:r>
             <a:endParaRPr lang="en-US" sz="1500" dirty="0"/>
           </a:p>
-          <a:p>
-            <a:pPr marL="342900" indent="-342900">
-              <a:spcAft>
-                <a:spcPts val="1200"/>
-              </a:spcAft>
-              <a:buSzPct val="100000"/>
-              <a:buChar char="•"/>
+        </p:txBody>
+      </p:sp>
+      <p:sp>
+        <p:nvSpPr>
+          <p:cNvPr id="10" name="passo"/>
+          <p:cNvSpPr/>
+          <p:nvPr/>
+        </p:nvSpPr>
+        <p:spPr>
+          <a:xfrm>
+            <a:off x="4663440" y="2788920"/>
+            <a:ext cx="457200" cy="457200"/>
+          </a:xfrm>
+          <a:prstGeom prst="ellipse">
+            <a:avLst/>
+          </a:prstGeom>
+          <a:solidFill>
+            <a:schemeClr val="accent1"/>
+          </a:solidFill>
+          <a:ln w="12700">
+            <a:solidFill>
+              <a:schemeClr val="accent1"/>
+            </a:solidFill>
+            <a:prstDash val="solid"/>
+          </a:ln>
+        </p:spPr>
+      </p:sp>
+      <p:sp>
+        <p:nvSpPr>
+          <p:cNvPr id="11" name="Text 8"/>
+          <p:cNvSpPr txBox="1"/>
+          <p:nvPr/>
+        </p:nvSpPr>
+        <p:spPr>
+          <a:xfrm>
+            <a:off x="4663440" y="2788920"/>
+            <a:ext cx="457200" cy="457200"/>
+          </a:xfrm>
+          <a:prstGeom prst="rect">
+            <a:avLst/>
+          </a:prstGeom>
+          <a:noFill/>
+          <a:ln/>
+        </p:spPr>
+        <p:txBody>
+          <a:bodyPr wrap="square" lIns="0" tIns="0" rIns="0" bIns="0" rtlCol="0" anchor="ctr"/>
+          <a:lstStyle/>
+          <a:p>
+            <a:pPr algn="ctr" indent="0" marL="0">
+              <a:buNone/>
+            </a:pPr>
+            <a:r>
+              <a:rPr lang="en-US" sz="1600" b="1" dirty="0">
+                <a:solidFill>
+                  <a:schemeClr val="bg1"/>
+                </a:solidFill>
+              </a:rPr>
+              <a:t>2</a:t>
+            </a:r>
+            <a:endParaRPr lang="en-US" sz="1600" dirty="0"/>
+          </a:p>
+        </p:txBody>
+      </p:sp>
+      <p:sp>
+        <p:nvSpPr>
+          <p:cNvPr id="12" name="Text 9"/>
+          <p:cNvSpPr txBox="1"/>
+          <p:nvPr/>
+        </p:nvSpPr>
+        <p:spPr>
+          <a:xfrm>
+            <a:off x="5303520" y="2743200"/>
+            <a:ext cx="6309360" cy="548640"/>
+          </a:xfrm>
+          <a:prstGeom prst="rect">
+            <a:avLst/>
+          </a:prstGeom>
+          <a:noFill/>
+          <a:ln/>
+        </p:spPr>
+        <p:txBody>
+          <a:bodyPr wrap="square" lIns="0" tIns="0" rIns="0" bIns="0" rtlCol="0" anchor="ctr"/>
+          <a:lstStyle/>
+          <a:p>
+            <a:pPr indent="0" marL="0">
+              <a:buNone/>
             </a:pPr>
             <a:r>
               <a:rPr lang="en-US" sz="1500" dirty="0">
@@ -2745,17 +2971,96 @@
                   <a:schemeClr val="tx1"/>
                 </a:solidFill>
               </a:rPr>
-              <a:t>Carrinho só ativo com stock</a:t>
+              <a:t>O pedido fica "em análise" até o gestor decidir</a:t>
             </a:r>
             <a:endParaRPr lang="en-US" sz="1500" dirty="0"/>
           </a:p>
-          <a:p>
-            <a:pPr marL="342900" indent="-342900">
-              <a:spcAft>
-                <a:spcPts val="1200"/>
-              </a:spcAft>
-              <a:buSzPct val="100000"/>
-              <a:buChar char="•"/>
+        </p:txBody>
+      </p:sp>
+      <p:sp>
+        <p:nvSpPr>
+          <p:cNvPr id="13" name="passo"/>
+          <p:cNvSpPr/>
+          <p:nvPr/>
+        </p:nvSpPr>
+        <p:spPr>
+          <a:xfrm>
+            <a:off x="4663440" y="3840480"/>
+            <a:ext cx="457200" cy="457200"/>
+          </a:xfrm>
+          <a:prstGeom prst="ellipse">
+            <a:avLst/>
+          </a:prstGeom>
+          <a:solidFill>
+            <a:schemeClr val="accent1"/>
+          </a:solidFill>
+          <a:ln w="12700">
+            <a:solidFill>
+              <a:schemeClr val="accent1"/>
+            </a:solidFill>
+            <a:prstDash val="solid"/>
+          </a:ln>
+        </p:spPr>
+      </p:sp>
+      <p:sp>
+        <p:nvSpPr>
+          <p:cNvPr id="14" name="Text 11"/>
+          <p:cNvSpPr txBox="1"/>
+          <p:nvPr/>
+        </p:nvSpPr>
+        <p:spPr>
+          <a:xfrm>
+            <a:off x="4663440" y="3840480"/>
+            <a:ext cx="457200" cy="457200"/>
+          </a:xfrm>
+          <a:prstGeom prst="rect">
+            <a:avLst/>
+          </a:prstGeom>
+          <a:noFill/>
+          <a:ln/>
+        </p:spPr>
+        <p:txBody>
+          <a:bodyPr wrap="square" lIns="0" tIns="0" rIns="0" bIns="0" rtlCol="0" anchor="ctr"/>
+          <a:lstStyle/>
+          <a:p>
+            <a:pPr algn="ctr" indent="0" marL="0">
+              <a:buNone/>
+            </a:pPr>
+            <a:r>
+              <a:rPr lang="en-US" sz="1600" b="1" dirty="0">
+                <a:solidFill>
+                  <a:schemeClr val="bg1"/>
+                </a:solidFill>
+              </a:rPr>
+              <a:t>3</a:t>
+            </a:r>
+            <a:endParaRPr lang="en-US" sz="1600" dirty="0"/>
+          </a:p>
+        </p:txBody>
+      </p:sp>
+      <p:sp>
+        <p:nvSpPr>
+          <p:cNvPr id="15" name="Text 12"/>
+          <p:cNvSpPr txBox="1"/>
+          <p:nvPr/>
+        </p:nvSpPr>
+        <p:spPr>
+          <a:xfrm>
+            <a:off x="5303520" y="3794760"/>
+            <a:ext cx="6309360" cy="548640"/>
+          </a:xfrm>
+          <a:prstGeom prst="rect">
+            <a:avLst/>
+          </a:prstGeom>
+          <a:noFill/>
+          <a:ln/>
+        </p:spPr>
+        <p:txBody>
+          <a:bodyPr wrap="square" lIns="0" tIns="0" rIns="0" bIns="0" rtlCol="0" anchor="ctr"/>
+          <a:lstStyle/>
+          <a:p>
+            <a:pPr indent="0" marL="0">
+              <a:buNone/>
             </a:pPr>
             <a:r>
               <a:rPr lang="en-US" sz="1500" dirty="0">
@@ -2763,17 +3068,96 @@
                   <a:schemeClr val="tx1"/>
                 </a:solidFill>
               </a:rPr>
-              <a:t>Coluna extra só para o gestor alterar unidades</a:t>
+              <a:t>O gestor aceita (a versão é criada) ou recusa (US24)</a:t>
             </a:r>
             <a:endParaRPr lang="en-US" sz="1500" dirty="0"/>
           </a:p>
-          <a:p>
-            <a:pPr marL="342900" indent="-342900">
-              <a:spcAft>
-                <a:spcPts val="1200"/>
-              </a:spcAft>
-              <a:buSzPct val="100000"/>
-              <a:buChar char="•"/>
+        </p:txBody>
+      </p:sp>
+      <p:sp>
+        <p:nvSpPr>
+          <p:cNvPr id="16" name="passo"/>
+          <p:cNvSpPr/>
+          <p:nvPr/>
+        </p:nvSpPr>
+        <p:spPr>
+          <a:xfrm>
+            <a:off x="4663440" y="4892040"/>
+            <a:ext cx="457200" cy="457200"/>
+          </a:xfrm>
+          <a:prstGeom prst="ellipse">
+            <a:avLst/>
+          </a:prstGeom>
+          <a:solidFill>
+            <a:schemeClr val="accent1"/>
+          </a:solidFill>
+          <a:ln w="12700">
+            <a:solidFill>
+              <a:schemeClr val="accent1"/>
+            </a:solidFill>
+            <a:prstDash val="solid"/>
+          </a:ln>
+        </p:spPr>
+      </p:sp>
+      <p:sp>
+        <p:nvSpPr>
+          <p:cNvPr id="17" name="Text 14"/>
+          <p:cNvSpPr txBox="1"/>
+          <p:nvPr/>
+        </p:nvSpPr>
+        <p:spPr>
+          <a:xfrm>
+            <a:off x="4663440" y="4892040"/>
+            <a:ext cx="457200" cy="457200"/>
+          </a:xfrm>
+          <a:prstGeom prst="rect">
+            <a:avLst/>
+          </a:prstGeom>
+          <a:noFill/>
+          <a:ln/>
+        </p:spPr>
+        <p:txBody>
+          <a:bodyPr wrap="square" lIns="0" tIns="0" rIns="0" bIns="0" rtlCol="0" anchor="ctr"/>
+          <a:lstStyle/>
+          <a:p>
+            <a:pPr algn="ctr" indent="0" marL="0">
+              <a:buNone/>
+            </a:pPr>
+            <a:r>
+              <a:rPr lang="en-US" sz="1600" b="1" dirty="0">
+                <a:solidFill>
+                  <a:schemeClr val="bg1"/>
+                </a:solidFill>
+              </a:rPr>
+              <a:t>4</a:t>
+            </a:r>
+            <a:endParaRPr lang="en-US" sz="1600" dirty="0"/>
+          </a:p>
+        </p:txBody>
+      </p:sp>
+      <p:sp>
+        <p:nvSpPr>
+          <p:cNvPr id="18" name="Text 15"/>
+          <p:cNvSpPr txBox="1"/>
+          <p:nvPr/>
+        </p:nvSpPr>
+        <p:spPr>
+          <a:xfrm>
+            <a:off x="5303520" y="4846320"/>
+            <a:ext cx="6309360" cy="548640"/>
+          </a:xfrm>
+          <a:prstGeom prst="rect">
+            <a:avLst/>
+          </a:prstGeom>
+          <a:noFill/>
+          <a:ln/>
+        </p:spPr>
+        <p:txBody>
+          <a:bodyPr wrap="square" lIns="0" tIns="0" rIns="0" bIns="0" rtlCol="0" anchor="ctr"/>
+          <a:lstStyle/>
+          <a:p>
+            <a:pPr indent="0" marL="0">
+              <a:buNone/>
             </a:pPr>
             <a:r>
               <a:rPr lang="en-US" sz="1500" dirty="0">
@@ -2781,7 +3165,7 @@
                   <a:schemeClr val="tx1"/>
                 </a:solidFill>
               </a:rPr>
-              <a:t>Notas amarelas ligam cada elemento à sua user story</a:t>
+              <a:t>O utilizador recebe uma notificação no dashboard (US14)</a:t>
             </a:r>
             <a:endParaRPr lang="en-US" sz="1500" dirty="0"/>
           </a:p>
@@ -2889,7 +3273,7 @@
                   <a:schemeClr val="tx1"/>
                 </a:solidFill>
               </a:rPr>
-              <a:t>Carrinho, pagamento e telemóvel</a:t>
+              <a:t>Página de álbum: cinco user stories num ecrã</a:t>
             </a:r>
             <a:endParaRPr lang="en-US" sz="3200" dirty="0"/>
           </a:p>
@@ -2983,7 +3367,7 @@
       </p:sp>
       <p:pic>
         <p:nvPicPr>
-          <p:cNvPr id="6" name="esboco-carrinho" descr="C:\Users\rodri\Desktop\PGP\etapa1\esbocos\img\E02-carrinho-pagamento.png">    </p:cNvPr>
+          <p:cNvPr id="6" name="esboco-album" descr="C:\Users\rodri\Desktop\PGP\etapa1\esbocos\img\E01-pagina-album.png">    </p:cNvPr>
           <p:cNvPicPr>
             <a:picLocks noChangeAspect="1"/>
           </p:cNvPicPr>
@@ -2997,8 +3381,8 @@
         </p:blipFill>
         <p:spPr>
           <a:xfrm>
-            <a:off x="548640" y="1843802"/>
-            <a:ext cx="7863840" cy="3993356"/>
+            <a:off x="1095890" y="1371600"/>
+            <a:ext cx="6403579" cy="4937760"/>
           </a:xfrm>
           <a:prstGeom prst="rect">
             <a:avLst/>
@@ -3012,37 +3396,100 @@
           </a:effectLst>
         </p:spPr>
       </p:pic>
-      <p:pic>
-        <p:nvPicPr>
-          <p:cNvPr id="7" name="esboco-telemovel" descr="C:\Users\rodri\Desktop\PGP\etapa1\esbocos\img\E12-telemovel-carrinho.png">    </p:cNvPr>
-          <p:cNvPicPr>
-            <a:picLocks noChangeAspect="1"/>
-          </p:cNvPicPr>
-          <p:nvPr/>
-        </p:nvPicPr>
-        <p:blipFill>
-          <a:blip r:embed="rId2"/>
-          <a:stretch>
-            <a:fillRect/>
-          </a:stretch>
-        </p:blipFill>
-        <p:spPr>
-          <a:xfrm>
-            <a:off x="8778240" y="1707232"/>
-            <a:ext cx="2834640" cy="4266497"/>
-          </a:xfrm>
-          <a:prstGeom prst="rect">
-            <a:avLst/>
-          </a:prstGeom>
-          <a:effectLst>
-            <a:outerShdw sx="100000" sy="100000" kx="0" ky="0" algn="bl" rotWithShape="0" blurRad="76200" dist="25400" dir="5400000">
-              <a:srgbClr val="000000">
-                <a:alpha val="18000"/>
-              </a:srgbClr>
-            </a:outerShdw>
-          </a:effectLst>
-        </p:spPr>
-      </p:pic>
+      <p:sp>
+        <p:nvSpPr>
+          <p:cNvPr id="7" name="Text 4"/>
+          <p:cNvSpPr txBox="1"/>
+          <p:nvPr/>
+        </p:nvSpPr>
+        <p:spPr>
+          <a:xfrm>
+            <a:off x="8321040" y="1554480"/>
+            <a:ext cx="3291840" cy="4572000"/>
+          </a:xfrm>
+          <a:prstGeom prst="rect">
+            <a:avLst/>
+          </a:prstGeom>
+          <a:noFill/>
+          <a:ln/>
+        </p:spPr>
+        <p:txBody>
+          <a:bodyPr wrap="square" lIns="0" tIns="0" rIns="0" bIns="0" rtlCol="0" anchor="t"/>
+          <a:lstStyle/>
+          <a:p>
+            <a:pPr marL="342900" indent="-342900">
+              <a:spcAft>
+                <a:spcPts val="1200"/>
+              </a:spcAft>
+              <a:buSzPct val="100000"/>
+              <a:buChar char="•"/>
+            </a:pPr>
+            <a:r>
+              <a:rPr lang="en-US" sz="1500" dirty="0">
+                <a:solidFill>
+                  <a:schemeClr val="tx1"/>
+                </a:solidFill>
+              </a:rPr>
+              <a:t>Uma linha por versão, com o estado na loja: disponível, esgotada ou nunca vendida</a:t>
+            </a:r>
+            <a:endParaRPr lang="en-US" sz="1500" dirty="0"/>
+          </a:p>
+          <a:p>
+            <a:pPr marL="342900" indent="-342900">
+              <a:spcAft>
+                <a:spcPts val="1200"/>
+              </a:spcAft>
+              <a:buSzPct val="100000"/>
+              <a:buChar char="•"/>
+            </a:pPr>
+            <a:r>
+              <a:rPr lang="en-US" sz="1500" dirty="0">
+                <a:solidFill>
+                  <a:schemeClr val="tx1"/>
+                </a:solidFill>
+              </a:rPr>
+              <a:t>Carrinho só ativo com stock</a:t>
+            </a:r>
+            <a:endParaRPr lang="en-US" sz="1500" dirty="0"/>
+          </a:p>
+          <a:p>
+            <a:pPr marL="342900" indent="-342900">
+              <a:spcAft>
+                <a:spcPts val="1200"/>
+              </a:spcAft>
+              <a:buSzPct val="100000"/>
+              <a:buChar char="•"/>
+            </a:pPr>
+            <a:r>
+              <a:rPr lang="en-US" sz="1500" dirty="0">
+                <a:solidFill>
+                  <a:schemeClr val="tx1"/>
+                </a:solidFill>
+              </a:rPr>
+              <a:t>Coluna extra só para o gestor alterar unidades</a:t>
+            </a:r>
+            <a:endParaRPr lang="en-US" sz="1500" dirty="0"/>
+          </a:p>
+          <a:p>
+            <a:pPr marL="342900" indent="-342900">
+              <a:spcAft>
+                <a:spcPts val="1200"/>
+              </a:spcAft>
+              <a:buSzPct val="100000"/>
+              <a:buChar char="•"/>
+            </a:pPr>
+            <a:r>
+              <a:rPr lang="en-US" sz="1500" dirty="0">
+                <a:solidFill>
+                  <a:schemeClr val="tx1"/>
+                </a:solidFill>
+              </a:rPr>
+              <a:t>Notas amarelas ligam cada elemento à sua user story</a:t>
+            </a:r>
+            <a:endParaRPr lang="en-US" sz="1500" dirty="0"/>
+          </a:p>
+        </p:txBody>
+      </p:sp>
       <p:sp>
         <p:nvSpPr>
           <p:cNvPr id="25" name="Slide Number Placeholder 0"/>
@@ -3145,7 +3592,7 @@
                   <a:schemeClr val="tx1"/>
                 </a:solidFill>
               </a:rPr>
-              <a:t>O que perguntámos e o que assumimos</a:t>
+              <a:t>Carrinho, pagamento e telemóvel</a:t>
             </a:r>
             <a:endParaRPr lang="en-US" sz="3200" dirty="0"/>
           </a:p>
@@ -3231,6 +3678,262 @@
                   <a:schemeClr val="tx2"/>
                 </a:solidFill>
               </a:rPr>
+              <a:t>Miguel</a:t>
+            </a:r>
+            <a:endParaRPr lang="en-US" sz="1200" dirty="0"/>
+          </a:p>
+        </p:txBody>
+      </p:sp>
+      <p:pic>
+        <p:nvPicPr>
+          <p:cNvPr id="6" name="esboco-carrinho" descr="C:\Users\rodri\Desktop\PGP\etapa1\esbocos\img\E02-carrinho-pagamento.png">    </p:cNvPr>
+          <p:cNvPicPr>
+            <a:picLocks noChangeAspect="1"/>
+          </p:cNvPicPr>
+          <p:nvPr/>
+        </p:nvPicPr>
+        <p:blipFill>
+          <a:blip r:embed="rId1"/>
+          <a:stretch>
+            <a:fillRect/>
+          </a:stretch>
+        </p:blipFill>
+        <p:spPr>
+          <a:xfrm>
+            <a:off x="548640" y="1843802"/>
+            <a:ext cx="7863840" cy="3993356"/>
+          </a:xfrm>
+          <a:prstGeom prst="rect">
+            <a:avLst/>
+          </a:prstGeom>
+          <a:effectLst>
+            <a:outerShdw sx="100000" sy="100000" kx="0" ky="0" algn="bl" rotWithShape="0" blurRad="76200" dist="25400" dir="5400000">
+              <a:srgbClr val="000000">
+                <a:alpha val="18000"/>
+              </a:srgbClr>
+            </a:outerShdw>
+          </a:effectLst>
+        </p:spPr>
+      </p:pic>
+      <p:pic>
+        <p:nvPicPr>
+          <p:cNvPr id="7" name="esboco-telemovel" descr="C:\Users\rodri\Desktop\PGP\etapa1\esbocos\img\E12-telemovel-carrinho.png">    </p:cNvPr>
+          <p:cNvPicPr>
+            <a:picLocks noChangeAspect="1"/>
+          </p:cNvPicPr>
+          <p:nvPr/>
+        </p:nvPicPr>
+        <p:blipFill>
+          <a:blip r:embed="rId2"/>
+          <a:stretch>
+            <a:fillRect/>
+          </a:stretch>
+        </p:blipFill>
+        <p:spPr>
+          <a:xfrm>
+            <a:off x="8778240" y="1707232"/>
+            <a:ext cx="2834640" cy="4266497"/>
+          </a:xfrm>
+          <a:prstGeom prst="rect">
+            <a:avLst/>
+          </a:prstGeom>
+          <a:effectLst>
+            <a:outerShdw sx="100000" sy="100000" kx="0" ky="0" algn="bl" rotWithShape="0" blurRad="76200" dist="25400" dir="5400000">
+              <a:srgbClr val="000000">
+                <a:alpha val="18000"/>
+              </a:srgbClr>
+            </a:outerShdw>
+          </a:effectLst>
+        </p:spPr>
+      </p:pic>
+      <p:sp>
+        <p:nvSpPr>
+          <p:cNvPr id="25" name="Slide Number Placeholder 0"/>
+          <p:cNvSpPr>
+            <a:spLocks noGrp="1"/>
+          </p:cNvSpPr>
+          <p:nvPr>
+            <p:ph type="sldNum" sz="quarter" idx="4294967295"/>
+          </p:nvPr>
+        </p:nvSpPr>
+        <p:spPr>
+          <a:xfrm>
+            <a:off x="11247120" y="6446520"/>
+            <a:ext cx="457200" cy="274320"/>
+          </a:xfrm>
+          <a:prstGeom prst="rect">
+            <a:avLst/>
+          </a:prstGeom>
+          <a:extLst>
+            <a:ext uri="{C572A759-6A51-4108-AA02-DFA0A04FC94B}">
+              <ma14:wrappingTextBoxFlag xmlns:ma14="http://schemas.microsoft.com/office/mac/drawingml/2011/main" val="0"/>
+            </a:ext>
+          </a:extLst>
+        </p:spPr>
+        <p:txBody>
+          <a:bodyPr/>
+          <a:lstStyle>
+            <a:lvl1pPr>
+              <a:defRPr sz="1000">
+                <a:solidFill>
+                  <a:srgbClr val="71717A"/>
+                </a:solidFill>
+              </a:defRPr>
+            </a:lvl1pPr>
+          </a:lstStyle>
+          <a:p>
+            <a:pPr algn="r"/>
+            <a:fld id="{F7021451-1387-4CA6-816F-3879F97B5CBC}" type="slidenum">
+              <a:rPr b="0" lang="en-US"/>
+              <a:t>12</a:t>
+            </a:fld>
+            <a:endParaRPr lang="en-US"/>
+          </a:p>
+        </p:txBody>
+      </p:sp>
+    </p:spTree>
+  </p:cSld>
+  <p:clrMapOvr>
+    <a:masterClrMapping/>
+  </p:clrMapOvr>
+</p:sld>
+</file>
+
+<file path=ppt/slides/slide13.xml><?xml version="1.0" encoding="utf-8"?>
+<p:sld xmlns:a="http://schemas.openxmlformats.org/drawingml/2006/main" xmlns:r="http://schemas.openxmlformats.org/officeDocument/2006/relationships" xmlns:p="http://schemas.openxmlformats.org/presentationml/2006/main">
+  <p:cSld name="Slide 13">
+    <p:spTree>
+      <p:nvGrpSpPr>
+        <p:cNvPr id="1" name=""/>
+        <p:cNvGrpSpPr/>
+        <p:nvPr/>
+      </p:nvGrpSpPr>
+      <p:grpSpPr>
+        <a:xfrm>
+          <a:off x="0" y="0"/>
+          <a:ext cx="0" cy="0"/>
+          <a:chOff x="0" y="0"/>
+          <a:chExt cx="0" cy="0"/>
+        </a:xfrm>
+      </p:grpSpPr>
+      <p:sp>
+        <p:nvSpPr>
+          <p:cNvPr id="2" name="Text 0"/>
+          <p:cNvSpPr/>
+          <p:nvPr>
+            <p:ph idx="100" type="title" hasCustomPrompt="1"/>
+          </p:nvPr>
+        </p:nvSpPr>
+        <p:spPr>
+          <a:xfrm>
+            <a:off x="548640" y="320040"/>
+            <a:ext cx="9692640" cy="822960"/>
+          </a:xfrm>
+          <a:prstGeom prst="rect">
+            <a:avLst/>
+          </a:prstGeom>
+          <a:noFill/>
+          <a:ln/>
+        </p:spPr>
+        <p:txBody>
+          <a:bodyPr wrap="square" lIns="0" tIns="0" rIns="0" bIns="0" rtlCol="0" anchor="ctr"/>
+          <a:lstStyle/>
+          <a:p>
+            <a:pPr algn="l" indent="0" marL="0">
+              <a:buNone/>
+            </a:pPr>
+            <a:r>
+              <a:rPr lang="en-US" sz="3200" b="1" dirty="0">
+                <a:solidFill>
+                  <a:schemeClr val="tx1"/>
+                </a:solidFill>
+              </a:rPr>
+              <a:t>O que perguntámos e o que assumimos</a:t>
+            </a:r>
+            <a:endParaRPr lang="en-US" sz="3200" dirty="0"/>
+          </a:p>
+        </p:txBody>
+      </p:sp>
+      <p:sp>
+        <p:nvSpPr>
+          <p:cNvPr id="3" name="disco"/>
+          <p:cNvSpPr/>
+          <p:nvPr/>
+        </p:nvSpPr>
+        <p:spPr>
+          <a:xfrm>
+            <a:off x="10561320" y="411480"/>
+            <a:ext cx="640080" cy="640080"/>
+          </a:xfrm>
+          <a:prstGeom prst="ellipse">
+            <a:avLst/>
+          </a:prstGeom>
+          <a:solidFill>
+            <a:schemeClr val="tx1"/>
+          </a:solidFill>
+          <a:ln w="12700">
+            <a:solidFill>
+              <a:schemeClr val="tx1"/>
+            </a:solidFill>
+            <a:prstDash val="solid"/>
+          </a:ln>
+        </p:spPr>
+      </p:sp>
+      <p:sp>
+        <p:nvSpPr>
+          <p:cNvPr id="4" name="disco-centro"/>
+          <p:cNvSpPr/>
+          <p:nvPr/>
+        </p:nvSpPr>
+        <p:spPr>
+          <a:xfrm>
+            <a:off x="10762488" y="612648"/>
+            <a:ext cx="237744" cy="237744"/>
+          </a:xfrm>
+          <a:prstGeom prst="ellipse">
+            <a:avLst/>
+          </a:prstGeom>
+          <a:solidFill>
+            <a:schemeClr val="accent1"/>
+          </a:solidFill>
+          <a:ln w="12700">
+            <a:solidFill>
+              <a:schemeClr val="accent1"/>
+            </a:solidFill>
+            <a:prstDash val="solid"/>
+          </a:ln>
+        </p:spPr>
+      </p:sp>
+      <p:sp>
+        <p:nvSpPr>
+          <p:cNvPr id="5" name="apresentador"/>
+          <p:cNvSpPr txBox="1"/>
+          <p:nvPr/>
+        </p:nvSpPr>
+        <p:spPr>
+          <a:xfrm>
+            <a:off x="9418320" y="1097280"/>
+            <a:ext cx="2286000" cy="274320"/>
+          </a:xfrm>
+          <a:prstGeom prst="rect">
+            <a:avLst/>
+          </a:prstGeom>
+          <a:noFill/>
+          <a:ln/>
+        </p:spPr>
+        <p:txBody>
+          <a:bodyPr wrap="square" lIns="0" tIns="0" rIns="0" bIns="0" rtlCol="0" anchor="ctr"/>
+          <a:lstStyle/>
+          <a:p>
+            <a:pPr algn="r" indent="0" marL="0">
+              <a:buNone/>
+            </a:pPr>
+            <a:r>
+              <a:rPr lang="en-US" sz="1200" i="1" dirty="0">
+                <a:solidFill>
+                  <a:schemeClr val="tx2"/>
+                </a:solidFill>
+              </a:rPr>
               <a:t>Reis</a:t>
             </a:r>
             <a:endParaRPr lang="en-US" sz="1200" dirty="0"/>
@@ -3239,7 +3942,7 @@
       </p:sp>
       <p:graphicFrame>
         <p:nvGraphicFramePr>
-          <p:cNvPr id="13" name="tabela-suposicoes"/>
+          <p:cNvPr id="14" name="tabela-suposicoes"/>
           <p:cNvGraphicFramePr>
             <a:graphicFrameLocks noGrp="1"/>
           </p:cNvGraphicFramePr>
@@ -4020,7 +4723,7 @@
             <a:pPr algn="r"/>
             <a:fld id="{F7021451-1387-4CA6-816F-3879F97B5CBC}" type="slidenum">
               <a:rPr b="0" lang="en-US"/>
-              <a:t>12</a:t>
+              <a:t>13</a:t>
             </a:fld>
             <a:endParaRPr lang="en-US"/>
           </a:p>
@@ -4034,9 +4737,9 @@
 </p:sld>
 </file>
 
-<file path=ppt/slides/slide13.xml><?xml version="1.0" encoding="utf-8"?>
+<file path=ppt/slides/slide14.xml><?xml version="1.0" encoding="utf-8"?>
 <p:sld xmlns:a="http://schemas.openxmlformats.org/drawingml/2006/main" xmlns:r="http://schemas.openxmlformats.org/officeDocument/2006/relationships" xmlns:p="http://schemas.openxmlformats.org/presentationml/2006/main">
-  <p:cSld name="Slide 13">
+  <p:cSld name="Slide 14">
     <p:spTree>
       <p:nvGrpSpPr>
         <p:cNvPr id="1" name=""/>
@@ -4882,7 +5585,7 @@
                   <a:schemeClr val="tx1"/>
                 </a:solidFill>
               </a:rPr>
-              <a:t>Casos de uso: um diagrama por ator</a:t>
+              <a:t>Âmbito do produto e porquê Scrum</a:t>
             </a:r>
             <a:endParaRPr lang="en-US" sz="3200" dirty="0"/>
           </a:p>
@@ -4974,78 +5677,16 @@
           </a:p>
         </p:txBody>
       </p:sp>
-      <p:pic>
-        <p:nvPicPr>
-          <p:cNvPr id="6" name="diagrama-utilizador" descr="C:\Users\rodri\Desktop\PGP\etapa1\casos-uso\img\casos-uso-utilizador.png">    </p:cNvPr>
-          <p:cNvPicPr>
-            <a:picLocks noChangeAspect="1"/>
-          </p:cNvPicPr>
-          <p:nvPr/>
-        </p:nvPicPr>
-        <p:blipFill>
-          <a:blip r:embed="rId1"/>
-          <a:stretch>
-            <a:fillRect/>
-          </a:stretch>
-        </p:blipFill>
-        <p:spPr>
-          <a:xfrm>
-            <a:off x="548640" y="1295658"/>
-            <a:ext cx="3931920" cy="4998203"/>
-          </a:xfrm>
-          <a:prstGeom prst="rect">
-            <a:avLst/>
-          </a:prstGeom>
-          <a:effectLst>
-            <a:outerShdw sx="100000" sy="100000" kx="0" ky="0" algn="bl" rotWithShape="0" blurRad="76200" dist="25400" dir="5400000">
-              <a:srgbClr val="000000">
-                <a:alpha val="18000"/>
-              </a:srgbClr>
-            </a:outerShdw>
-          </a:effectLst>
-        </p:spPr>
-      </p:pic>
-      <p:pic>
-        <p:nvPicPr>
-          <p:cNvPr id="7" name="diagrama-gestor" descr="C:\Users\rodri\Desktop\PGP\etapa1\casos-uso\img\casos-uso-gestor.png">    </p:cNvPr>
-          <p:cNvPicPr>
-            <a:picLocks noChangeAspect="1"/>
-          </p:cNvPicPr>
-          <p:nvPr/>
-        </p:nvPicPr>
-        <p:blipFill>
-          <a:blip r:embed="rId2"/>
-          <a:stretch>
-            <a:fillRect/>
-          </a:stretch>
-        </p:blipFill>
-        <p:spPr>
-          <a:xfrm>
-            <a:off x="4899074" y="1463040"/>
-            <a:ext cx="3734972" cy="2468880"/>
-          </a:xfrm>
-          <a:prstGeom prst="rect">
-            <a:avLst/>
-          </a:prstGeom>
-          <a:effectLst>
-            <a:outerShdw sx="100000" sy="100000" kx="0" ky="0" algn="bl" rotWithShape="0" blurRad="76200" dist="25400" dir="5400000">
-              <a:srgbClr val="000000">
-                <a:alpha val="18000"/>
-              </a:srgbClr>
-            </a:outerShdw>
-          </a:effectLst>
-        </p:spPr>
-      </p:pic>
-      <p:sp>
-        <p:nvSpPr>
-          <p:cNvPr id="8" name="Text 4"/>
+      <p:sp>
+        <p:nvSpPr>
+          <p:cNvPr id="6" name="Text 4"/>
           <p:cNvSpPr txBox="1"/>
           <p:nvPr/>
         </p:nvSpPr>
         <p:spPr>
           <a:xfrm>
-            <a:off x="4754880" y="4206240"/>
-            <a:ext cx="6858000" cy="2011680"/>
+            <a:off x="548640" y="1463040"/>
+            <a:ext cx="5120640" cy="365760"/>
           </a:xfrm>
           <a:prstGeom prst="rect">
             <a:avLst/>
@@ -5054,12 +5695,48 @@
           <a:ln/>
         </p:spPr>
         <p:txBody>
+          <a:bodyPr wrap="square" lIns="0" tIns="0" rIns="0" bIns="0" rtlCol="0" anchor="ctr"/>
+          <a:lstStyle/>
+          <a:p>
+            <a:pPr indent="0" marL="0">
+              <a:buNone/>
+            </a:pPr>
+            <a:r>
+              <a:rPr lang="en-US" sz="1800" b="1" dirty="0">
+                <a:solidFill>
+                  <a:schemeClr val="tx1"/>
+                </a:solidFill>
+              </a:rPr>
+              <a:t>Pressupostos (estimativas da equipa)</a:t>
+            </a:r>
+            <a:endParaRPr lang="en-US" sz="1800" dirty="0"/>
+          </a:p>
+        </p:txBody>
+      </p:sp>
+      <p:sp>
+        <p:nvSpPr>
+          <p:cNvPr id="7" name="Text 5"/>
+          <p:cNvSpPr txBox="1"/>
+          <p:nvPr/>
+        </p:nvSpPr>
+        <p:spPr>
+          <a:xfrm>
+            <a:off x="548640" y="1920240"/>
+            <a:ext cx="5120640" cy="3840480"/>
+          </a:xfrm>
+          <a:prstGeom prst="rect">
+            <a:avLst/>
+          </a:prstGeom>
+          <a:noFill/>
+          <a:ln/>
+        </p:spPr>
+        <p:txBody>
           <a:bodyPr wrap="square" lIns="0" tIns="0" rIns="0" bIns="0" rtlCol="0" anchor="t"/>
           <a:lstStyle/>
           <a:p>
             <a:pPr marL="342900" indent="-342900">
               <a:spcAft>
-                <a:spcPts val="800"/>
+                <a:spcPts val="1000"/>
               </a:spcAft>
               <a:buSzPct val="100000"/>
               <a:buChar char="•"/>
@@ -5070,14 +5747,14 @@
                   <a:schemeClr val="tx1"/>
                 </a:solidFill>
               </a:rPr>
-              <a:t>Um só diagrama com 21 casos de uso tinha linhas cruzadas por todo o lado: dividimos por ator.</a:t>
+              <a:t>1 000 utilizadores registados, até 50 em simultâneo</a:t>
             </a:r>
             <a:endParaRPr lang="en-US" sz="1500" dirty="0"/>
           </a:p>
           <a:p>
             <a:pPr marL="342900" indent="-342900">
               <a:spcAft>
-                <a:spcPts val="800"/>
+                <a:spcPts val="1000"/>
               </a:spcAft>
               <a:buSzPct val="100000"/>
               <a:buChar char="•"/>
@@ -5088,14 +5765,14 @@
                   <a:schemeClr val="tx1"/>
                 </a:solidFill>
               </a:rPr>
-              <a:t>Serviços externos ligados aos casos de uso que os usam: mapas, geocodificação e pagamentos.</a:t>
+              <a:t>2 000 álbuns e 4 000 versões no catálogo</a:t>
             </a:r>
             <a:endParaRPr lang="en-US" sz="1500" dirty="0"/>
           </a:p>
           <a:p>
             <a:pPr marL="342900" indent="-342900">
               <a:spcAft>
-                <a:spcPts val="800"/>
+                <a:spcPts val="1000"/>
               </a:spcAft>
               <a:buSzPct val="100000"/>
               <a:buChar char="•"/>
@@ -5106,9 +5783,577 @@
                   <a:schemeClr val="tx1"/>
                 </a:solidFill>
               </a:rPr>
-              <a:t>As 29 user stories estão todas cobertas (matriz US↔UC).</a:t>
+              <a:t>Páginas em até 2 s; sugestões da pesquisa em até 300 ms (RNF-08)</a:t>
             </a:r>
             <a:endParaRPr lang="en-US" sz="1500" dirty="0"/>
+          </a:p>
+          <a:p>
+            <a:pPr marL="342900" indent="-342900">
+              <a:spcAft>
+                <a:spcPts val="1000"/>
+              </a:spcAft>
+              <a:buSzPct val="100000"/>
+              <a:buChar char="•"/>
+            </a:pPr>
+            <a:r>
+              <a:rPr lang="en-US" sz="1500" dirty="0">
+                <a:solidFill>
+                  <a:schemeClr val="tx1"/>
+                </a:solidFill>
+              </a:rPr>
+              <a:t>Backend sem estado, para poder acrescentar nós (RNF-10)</a:t>
+            </a:r>
+            <a:endParaRPr lang="en-US" sz="1500" dirty="0"/>
+          </a:p>
+          <a:p>
+            <a:pPr marL="342900" indent="-342900">
+              <a:spcAft>
+                <a:spcPts val="1000"/>
+              </a:spcAft>
+              <a:buSzPct val="100000"/>
+              <a:buChar char="•"/>
+            </a:pPr>
+            <a:r>
+              <a:rPr lang="en-US" sz="1500" dirty="0">
+                <a:solidFill>
+                  <a:schemeClr val="tx1"/>
+                </a:solidFill>
+              </a:rPr>
+              <a:t>Restrições: MEAN, custo gratuito, Nominatim a 1 pedido/s, pagamentos só em teste</a:t>
+            </a:r>
+            <a:endParaRPr lang="en-US" sz="1500" dirty="0"/>
+          </a:p>
+        </p:txBody>
+      </p:sp>
+      <p:sp>
+        <p:nvSpPr>
+          <p:cNvPr id="8" name="cartao"/>
+          <p:cNvSpPr/>
+          <p:nvPr/>
+        </p:nvSpPr>
+        <p:spPr>
+          <a:xfrm>
+            <a:off x="6035040" y="1463040"/>
+            <a:ext cx="2743200" cy="2103120"/>
+          </a:xfrm>
+          <a:prstGeom prst="roundRect">
+            <a:avLst>
+              <a:gd name="adj" fmla="val 3478"/>
+            </a:avLst>
+          </a:prstGeom>
+          <a:solidFill>
+            <a:schemeClr val="bg2"/>
+          </a:solidFill>
+          <a:ln w="12700">
+            <a:solidFill>
+              <a:srgbClr val="E4E4E7"/>
+            </a:solidFill>
+            <a:prstDash val="solid"/>
+          </a:ln>
+        </p:spPr>
+      </p:sp>
+      <p:sp>
+        <p:nvSpPr>
+          <p:cNvPr id="9" name="marca"/>
+          <p:cNvSpPr/>
+          <p:nvPr/>
+        </p:nvSpPr>
+        <p:spPr>
+          <a:xfrm>
+            <a:off x="6263640" y="1719072"/>
+            <a:ext cx="201168" cy="201168"/>
+          </a:xfrm>
+          <a:prstGeom prst="ellipse">
+            <a:avLst/>
+          </a:prstGeom>
+          <a:solidFill>
+            <a:schemeClr val="accent1"/>
+          </a:solidFill>
+          <a:ln w="12700">
+            <a:solidFill>
+              <a:schemeClr val="accent1"/>
+            </a:solidFill>
+            <a:prstDash val="solid"/>
+          </a:ln>
+        </p:spPr>
+      </p:sp>
+      <p:sp>
+        <p:nvSpPr>
+          <p:cNvPr id="10" name="Text 8"/>
+          <p:cNvSpPr txBox="1"/>
+          <p:nvPr/>
+        </p:nvSpPr>
+        <p:spPr>
+          <a:xfrm>
+            <a:off x="6583680" y="1627632"/>
+            <a:ext cx="2011680" cy="384048"/>
+          </a:xfrm>
+          <a:prstGeom prst="rect">
+            <a:avLst/>
+          </a:prstGeom>
+          <a:noFill/>
+          <a:ln/>
+        </p:spPr>
+        <p:txBody>
+          <a:bodyPr wrap="square" lIns="0" tIns="0" rIns="0" bIns="0" rtlCol="0" anchor="ctr"/>
+          <a:lstStyle/>
+          <a:p>
+            <a:pPr indent="0" marL="0">
+              <a:buNone/>
+            </a:pPr>
+            <a:r>
+              <a:rPr lang="en-US" sz="1600" b="1" dirty="0">
+                <a:solidFill>
+                  <a:schemeClr val="tx1"/>
+                </a:solidFill>
+              </a:rPr>
+              <a:t>Cliente</a:t>
+            </a:r>
+            <a:endParaRPr lang="en-US" sz="1600" dirty="0"/>
+          </a:p>
+        </p:txBody>
+      </p:sp>
+      <p:sp>
+        <p:nvSpPr>
+          <p:cNvPr id="11" name="Text 9"/>
+          <p:cNvSpPr txBox="1"/>
+          <p:nvPr/>
+        </p:nvSpPr>
+        <p:spPr>
+          <a:xfrm>
+            <a:off x="6583680" y="2029968"/>
+            <a:ext cx="2011680" cy="1417320"/>
+          </a:xfrm>
+          <a:prstGeom prst="rect">
+            <a:avLst/>
+          </a:prstGeom>
+          <a:noFill/>
+          <a:ln/>
+        </p:spPr>
+        <p:txBody>
+          <a:bodyPr wrap="square" lIns="0" tIns="0" rIns="0" bIns="0" rtlCol="0" anchor="t"/>
+          <a:lstStyle/>
+          <a:p>
+            <a:pPr indent="0" marL="0">
+              <a:buNone/>
+            </a:pPr>
+            <a:r>
+              <a:rPr lang="en-US" sz="1600" dirty="0">
+                <a:solidFill>
+                  <a:schemeClr val="tx2"/>
+                </a:solidFill>
+              </a:rPr>
+              <a:t>Participativo: demonstrações no fim de março, abril e maio.</a:t>
+            </a:r>
+            <a:endParaRPr lang="en-US" sz="1600" dirty="0"/>
+          </a:p>
+        </p:txBody>
+      </p:sp>
+      <p:sp>
+        <p:nvSpPr>
+          <p:cNvPr id="12" name="cartao"/>
+          <p:cNvSpPr/>
+          <p:nvPr/>
+        </p:nvSpPr>
+        <p:spPr>
+          <a:xfrm>
+            <a:off x="8915400" y="1463040"/>
+            <a:ext cx="2743200" cy="2103120"/>
+          </a:xfrm>
+          <a:prstGeom prst="roundRect">
+            <a:avLst>
+              <a:gd name="adj" fmla="val 3478"/>
+            </a:avLst>
+          </a:prstGeom>
+          <a:solidFill>
+            <a:schemeClr val="bg2"/>
+          </a:solidFill>
+          <a:ln w="12700">
+            <a:solidFill>
+              <a:srgbClr val="E4E4E7"/>
+            </a:solidFill>
+            <a:prstDash val="solid"/>
+          </a:ln>
+        </p:spPr>
+      </p:sp>
+      <p:sp>
+        <p:nvSpPr>
+          <p:cNvPr id="13" name="marca"/>
+          <p:cNvSpPr/>
+          <p:nvPr/>
+        </p:nvSpPr>
+        <p:spPr>
+          <a:xfrm>
+            <a:off x="9144000" y="1719072"/>
+            <a:ext cx="201168" cy="201168"/>
+          </a:xfrm>
+          <a:prstGeom prst="ellipse">
+            <a:avLst/>
+          </a:prstGeom>
+          <a:solidFill>
+            <a:schemeClr val="accent1"/>
+          </a:solidFill>
+          <a:ln w="12700">
+            <a:solidFill>
+              <a:schemeClr val="accent1"/>
+            </a:solidFill>
+            <a:prstDash val="solid"/>
+          </a:ln>
+        </p:spPr>
+      </p:sp>
+      <p:sp>
+        <p:nvSpPr>
+          <p:cNvPr id="14" name="Text 12"/>
+          <p:cNvSpPr txBox="1"/>
+          <p:nvPr/>
+        </p:nvSpPr>
+        <p:spPr>
+          <a:xfrm>
+            <a:off x="9464040" y="1627632"/>
+            <a:ext cx="2011680" cy="384048"/>
+          </a:xfrm>
+          <a:prstGeom prst="rect">
+            <a:avLst/>
+          </a:prstGeom>
+          <a:noFill/>
+          <a:ln/>
+        </p:spPr>
+        <p:txBody>
+          <a:bodyPr wrap="square" lIns="0" tIns="0" rIns="0" bIns="0" rtlCol="0" anchor="ctr"/>
+          <a:lstStyle/>
+          <a:p>
+            <a:pPr indent="0" marL="0">
+              <a:buNone/>
+            </a:pPr>
+            <a:r>
+              <a:rPr lang="en-US" sz="1600" b="1" dirty="0">
+                <a:solidFill>
+                  <a:schemeClr val="tx1"/>
+                </a:solidFill>
+              </a:rPr>
+              <a:t>Pessoas</a:t>
+            </a:r>
+            <a:endParaRPr lang="en-US" sz="1600" dirty="0"/>
+          </a:p>
+        </p:txBody>
+      </p:sp>
+      <p:sp>
+        <p:nvSpPr>
+          <p:cNvPr id="15" name="Text 13"/>
+          <p:cNvSpPr txBox="1"/>
+          <p:nvPr/>
+        </p:nvSpPr>
+        <p:spPr>
+          <a:xfrm>
+            <a:off x="9464040" y="2029968"/>
+            <a:ext cx="2011680" cy="1417320"/>
+          </a:xfrm>
+          <a:prstGeom prst="rect">
+            <a:avLst/>
+          </a:prstGeom>
+          <a:noFill/>
+          <a:ln/>
+        </p:spPr>
+        <p:txBody>
+          <a:bodyPr wrap="square" lIns="0" tIns="0" rIns="0" bIns="0" rtlCol="0" anchor="t"/>
+          <a:lstStyle/>
+          <a:p>
+            <a:pPr indent="0" marL="0">
+              <a:buNone/>
+            </a:pPr>
+            <a:r>
+              <a:rPr lang="en-US" sz="1600" dirty="0">
+                <a:solidFill>
+                  <a:schemeClr val="tx2"/>
+                </a:solidFill>
+              </a:rPr>
+              <a:t>Equipa de 5, dentro dos 3 a 9 do Scrum.</a:t>
+            </a:r>
+            <a:endParaRPr lang="en-US" sz="1600" dirty="0"/>
+          </a:p>
+        </p:txBody>
+      </p:sp>
+      <p:sp>
+        <p:nvSpPr>
+          <p:cNvPr id="16" name="cartao"/>
+          <p:cNvSpPr/>
+          <p:nvPr/>
+        </p:nvSpPr>
+        <p:spPr>
+          <a:xfrm>
+            <a:off x="6035040" y="3749040"/>
+            <a:ext cx="2743200" cy="2103120"/>
+          </a:xfrm>
+          <a:prstGeom prst="roundRect">
+            <a:avLst>
+              <a:gd name="adj" fmla="val 3478"/>
+            </a:avLst>
+          </a:prstGeom>
+          <a:solidFill>
+            <a:schemeClr val="bg2"/>
+          </a:solidFill>
+          <a:ln w="12700">
+            <a:solidFill>
+              <a:srgbClr val="E4E4E7"/>
+            </a:solidFill>
+            <a:prstDash val="solid"/>
+          </a:ln>
+        </p:spPr>
+      </p:sp>
+      <p:sp>
+        <p:nvSpPr>
+          <p:cNvPr id="17" name="marca"/>
+          <p:cNvSpPr/>
+          <p:nvPr/>
+        </p:nvSpPr>
+        <p:spPr>
+          <a:xfrm>
+            <a:off x="6263640" y="4005072"/>
+            <a:ext cx="201168" cy="201168"/>
+          </a:xfrm>
+          <a:prstGeom prst="ellipse">
+            <a:avLst/>
+          </a:prstGeom>
+          <a:solidFill>
+            <a:schemeClr val="accent1"/>
+          </a:solidFill>
+          <a:ln w="12700">
+            <a:solidFill>
+              <a:schemeClr val="accent1"/>
+            </a:solidFill>
+            <a:prstDash val="solid"/>
+          </a:ln>
+        </p:spPr>
+      </p:sp>
+      <p:sp>
+        <p:nvSpPr>
+          <p:cNvPr id="18" name="Text 16"/>
+          <p:cNvSpPr txBox="1"/>
+          <p:nvPr/>
+        </p:nvSpPr>
+        <p:spPr>
+          <a:xfrm>
+            <a:off x="6583680" y="3913632"/>
+            <a:ext cx="2011680" cy="384048"/>
+          </a:xfrm>
+          <a:prstGeom prst="rect">
+            <a:avLst/>
+          </a:prstGeom>
+          <a:noFill/>
+          <a:ln/>
+        </p:spPr>
+        <p:txBody>
+          <a:bodyPr wrap="square" lIns="0" tIns="0" rIns="0" bIns="0" rtlCol="0" anchor="ctr"/>
+          <a:lstStyle/>
+          <a:p>
+            <a:pPr indent="0" marL="0">
+              <a:buNone/>
+            </a:pPr>
+            <a:r>
+              <a:rPr lang="en-US" sz="1600" b="1" dirty="0">
+                <a:solidFill>
+                  <a:schemeClr val="tx1"/>
+                </a:solidFill>
+              </a:rPr>
+              <a:t>Produto</a:t>
+            </a:r>
+            <a:endParaRPr lang="en-US" sz="1600" dirty="0"/>
+          </a:p>
+        </p:txBody>
+      </p:sp>
+      <p:sp>
+        <p:nvSpPr>
+          <p:cNvPr id="19" name="Text 17"/>
+          <p:cNvSpPr txBox="1"/>
+          <p:nvPr/>
+        </p:nvSpPr>
+        <p:spPr>
+          <a:xfrm>
+            <a:off x="6583680" y="4315968"/>
+            <a:ext cx="2011680" cy="1417320"/>
+          </a:xfrm>
+          <a:prstGeom prst="rect">
+            <a:avLst/>
+          </a:prstGeom>
+          <a:noFill/>
+          <a:ln/>
+        </p:spPr>
+        <p:txBody>
+          <a:bodyPr wrap="square" lIns="0" tIns="0" rIns="0" bIns="0" rtlCol="0" anchor="t"/>
+          <a:lstStyle/>
+          <a:p>
+            <a:pPr indent="0" marL="0">
+              <a:buNone/>
+            </a:pPr>
+            <a:r>
+              <a:rPr lang="en-US" sz="1600" dirty="0">
+                <a:solidFill>
+                  <a:schemeClr val="tx2"/>
+                </a:solidFill>
+              </a:rPr>
+              <a:t>Requisitos podem mudar: o cliente pode pedir alterações.</a:t>
+            </a:r>
+            <a:endParaRPr lang="en-US" sz="1600" dirty="0"/>
+          </a:p>
+        </p:txBody>
+      </p:sp>
+      <p:sp>
+        <p:nvSpPr>
+          <p:cNvPr id="20" name="cartao"/>
+          <p:cNvSpPr/>
+          <p:nvPr/>
+        </p:nvSpPr>
+        <p:spPr>
+          <a:xfrm>
+            <a:off x="8915400" y="3749040"/>
+            <a:ext cx="2743200" cy="2103120"/>
+          </a:xfrm>
+          <a:prstGeom prst="roundRect">
+            <a:avLst>
+              <a:gd name="adj" fmla="val 3478"/>
+            </a:avLst>
+          </a:prstGeom>
+          <a:solidFill>
+            <a:schemeClr val="bg2"/>
+          </a:solidFill>
+          <a:ln w="12700">
+            <a:solidFill>
+              <a:srgbClr val="E4E4E7"/>
+            </a:solidFill>
+            <a:prstDash val="solid"/>
+          </a:ln>
+        </p:spPr>
+      </p:sp>
+      <p:sp>
+        <p:nvSpPr>
+          <p:cNvPr id="21" name="marca"/>
+          <p:cNvSpPr/>
+          <p:nvPr/>
+        </p:nvSpPr>
+        <p:spPr>
+          <a:xfrm>
+            <a:off x="9144000" y="4005072"/>
+            <a:ext cx="201168" cy="201168"/>
+          </a:xfrm>
+          <a:prstGeom prst="ellipse">
+            <a:avLst/>
+          </a:prstGeom>
+          <a:solidFill>
+            <a:schemeClr val="accent1"/>
+          </a:solidFill>
+          <a:ln w="12700">
+            <a:solidFill>
+              <a:schemeClr val="accent1"/>
+            </a:solidFill>
+            <a:prstDash val="solid"/>
+          </a:ln>
+        </p:spPr>
+      </p:sp>
+      <p:sp>
+        <p:nvSpPr>
+          <p:cNvPr id="22" name="Text 20"/>
+          <p:cNvSpPr txBox="1"/>
+          <p:nvPr/>
+        </p:nvSpPr>
+        <p:spPr>
+          <a:xfrm>
+            <a:off x="9464040" y="3913632"/>
+            <a:ext cx="2011680" cy="384048"/>
+          </a:xfrm>
+          <a:prstGeom prst="rect">
+            <a:avLst/>
+          </a:prstGeom>
+          <a:noFill/>
+          <a:ln/>
+        </p:spPr>
+        <p:txBody>
+          <a:bodyPr wrap="square" lIns="0" tIns="0" rIns="0" bIns="0" rtlCol="0" anchor="ctr"/>
+          <a:lstStyle/>
+          <a:p>
+            <a:pPr indent="0" marL="0">
+              <a:buNone/>
+            </a:pPr>
+            <a:r>
+              <a:rPr lang="en-US" sz="1600" b="1" dirty="0">
+                <a:solidFill>
+                  <a:schemeClr val="tx1"/>
+                </a:solidFill>
+              </a:rPr>
+              <a:t>Ambiente</a:t>
+            </a:r>
+            <a:endParaRPr lang="en-US" sz="1600" dirty="0"/>
+          </a:p>
+        </p:txBody>
+      </p:sp>
+      <p:sp>
+        <p:nvSpPr>
+          <p:cNvPr id="23" name="Text 21"/>
+          <p:cNvSpPr txBox="1"/>
+          <p:nvPr/>
+        </p:nvSpPr>
+        <p:spPr>
+          <a:xfrm>
+            <a:off x="9464040" y="4315968"/>
+            <a:ext cx="2011680" cy="1417320"/>
+          </a:xfrm>
+          <a:prstGeom prst="rect">
+            <a:avLst/>
+          </a:prstGeom>
+          <a:noFill/>
+          <a:ln/>
+        </p:spPr>
+        <p:txBody>
+          <a:bodyPr wrap="square" lIns="0" tIns="0" rIns="0" bIns="0" rtlCol="0" anchor="t"/>
+          <a:lstStyle/>
+          <a:p>
+            <a:pPr indent="0" marL="0">
+              <a:buNone/>
+            </a:pPr>
+            <a:r>
+              <a:rPr lang="en-US" sz="1600" dirty="0">
+                <a:solidFill>
+                  <a:schemeClr val="tx2"/>
+                </a:solidFill>
+              </a:rPr>
+              <a:t>Semestre com 3 sprints de cerca de um mês.</a:t>
+            </a:r>
+            <a:endParaRPr lang="en-US" sz="1600" dirty="0"/>
+          </a:p>
+        </p:txBody>
+      </p:sp>
+      <p:sp>
+        <p:nvSpPr>
+          <p:cNvPr id="24" name="Text 22"/>
+          <p:cNvSpPr txBox="1"/>
+          <p:nvPr/>
+        </p:nvSpPr>
+        <p:spPr>
+          <a:xfrm>
+            <a:off x="6035040" y="5943600"/>
+            <a:ext cx="5623560" cy="411480"/>
+          </a:xfrm>
+          <a:prstGeom prst="rect">
+            <a:avLst/>
+          </a:prstGeom>
+          <a:noFill/>
+          <a:ln/>
+        </p:spPr>
+        <p:txBody>
+          <a:bodyPr wrap="square" lIns="0" tIns="0" rIns="0" bIns="0" rtlCol="0" anchor="ctr"/>
+          <a:lstStyle/>
+          <a:p>
+            <a:pPr indent="0" marL="0">
+              <a:buNone/>
+            </a:pPr>
+            <a:r>
+              <a:rPr lang="en-US" sz="1200" i="1" dirty="0">
+                <a:solidFill>
+                  <a:schemeClr val="tx2"/>
+                </a:solidFill>
+              </a:rPr>
+              <a:t>A cascata exige requisitos estáveis e só entrega no fim; o Scrum entrega em cada sprint e reordena o backlog.</a:t>
+            </a:r>
+            <a:endParaRPr lang="en-US" sz="1200" dirty="0"/>
           </a:p>
         </p:txBody>
       </p:sp>
@@ -5214,7 +6459,7 @@
                   <a:schemeClr val="tx1"/>
                 </a:solidFill>
               </a:rPr>
-              <a:t>Modelo de dados: 19 classes em 5 grupos</a:t>
+              <a:t>Casos de uso: um diagrama por ator</a:t>
             </a:r>
             <a:endParaRPr lang="en-US" sz="3200" dirty="0"/>
           </a:p>
@@ -5300,7 +6545,7 @@
                   <a:schemeClr val="tx2"/>
                 </a:solidFill>
               </a:rPr>
-              <a:t>Rodrigo</a:t>
+              <a:t>Reis</a:t>
             </a:r>
             <a:endParaRPr lang="en-US" sz="1200" dirty="0"/>
           </a:p>
@@ -5308,7 +6553,7 @@
       </p:sp>
       <p:pic>
         <p:nvPicPr>
-          <p:cNvPr id="6" name="diagrama-topo" descr="C:\Users\rodri\Desktop\PGP\etapa1\classes\img\01-topo.png">    </p:cNvPr>
+          <p:cNvPr id="6" name="diagrama-utilizador" descr="C:\Users\rodri\Desktop\PGP\etapa1\casos-uso\img\casos-uso-utilizador.png">    </p:cNvPr>
           <p:cNvPicPr>
             <a:picLocks noChangeAspect="1"/>
           </p:cNvPicPr>
@@ -5322,8 +6567,8 @@
         </p:blipFill>
         <p:spPr>
           <a:xfrm>
-            <a:off x="2931965" y="1371600"/>
-            <a:ext cx="6297590" cy="4297680"/>
+            <a:off x="548640" y="1295658"/>
+            <a:ext cx="3931920" cy="4998203"/>
           </a:xfrm>
           <a:prstGeom prst="rect">
             <a:avLst/>
@@ -5337,16 +6582,47 @@
           </a:effectLst>
         </p:spPr>
       </p:pic>
-      <p:sp>
-        <p:nvSpPr>
-          <p:cNvPr id="7" name="Text 4"/>
+      <p:pic>
+        <p:nvPicPr>
+          <p:cNvPr id="7" name="diagrama-gestor" descr="C:\Users\rodri\Desktop\PGP\etapa1\casos-uso\img\casos-uso-gestor.png">    </p:cNvPr>
+          <p:cNvPicPr>
+            <a:picLocks noChangeAspect="1"/>
+          </p:cNvPicPr>
+          <p:nvPr/>
+        </p:nvPicPr>
+        <p:blipFill>
+          <a:blip r:embed="rId2"/>
+          <a:stretch>
+            <a:fillRect/>
+          </a:stretch>
+        </p:blipFill>
+        <p:spPr>
+          <a:xfrm>
+            <a:off x="4899074" y="1463040"/>
+            <a:ext cx="3734972" cy="2468880"/>
+          </a:xfrm>
+          <a:prstGeom prst="rect">
+            <a:avLst/>
+          </a:prstGeom>
+          <a:effectLst>
+            <a:outerShdw sx="100000" sy="100000" kx="0" ky="0" algn="bl" rotWithShape="0" blurRad="76200" dist="25400" dir="5400000">
+              <a:srgbClr val="000000">
+                <a:alpha val="18000"/>
+              </a:srgbClr>
+            </a:outerShdw>
+          </a:effectLst>
+        </p:spPr>
+      </p:pic>
+      <p:sp>
+        <p:nvSpPr>
+          <p:cNvPr id="8" name="Text 4"/>
           <p:cNvSpPr txBox="1"/>
           <p:nvPr/>
         </p:nvSpPr>
         <p:spPr>
           <a:xfrm>
-            <a:off x="548640" y="5760720"/>
-            <a:ext cx="11064240" cy="548640"/>
+            <a:off x="4754880" y="4206240"/>
+            <a:ext cx="6858000" cy="2011680"/>
           </a:xfrm>
           <a:prstGeom prst="rect">
             <a:avLst/>
@@ -5355,43 +6631,61 @@
           <a:ln/>
         </p:spPr>
         <p:txBody>
-          <a:bodyPr wrap="square" lIns="0" tIns="0" rIns="0" bIns="0" rtlCol="0" anchor="ctr"/>
-          <a:lstStyle/>
-          <a:p>
-            <a:pPr indent="0" marL="0">
-              <a:buNone/>
-            </a:pPr>
-            <a:r>
-              <a:rPr lang="en-US" sz="1600" dirty="0">
+          <a:bodyPr wrap="square" lIns="0" tIns="0" rIns="0" bIns="0" rtlCol="0" anchor="t"/>
+          <a:lstStyle/>
+          <a:p>
+            <a:pPr marL="342900" indent="-342900">
+              <a:spcAft>
+                <a:spcPts val="800"/>
+              </a:spcAft>
+              <a:buSzPct val="100000"/>
+              <a:buChar char="•"/>
+            </a:pPr>
+            <a:r>
+              <a:rPr lang="en-US" sz="1500" dirty="0">
                 <a:solidFill>
                   <a:schemeClr val="tx1"/>
                 </a:solidFill>
               </a:rPr>
-              <a:t>A classe central é a </a:t>
-            </a:r>
-            <a:pPr indent="0" marL="0">
-              <a:buNone/>
-            </a:pPr>
-            <a:r>
-              <a:rPr lang="en-US" sz="1600" b="1" dirty="0">
-                <a:solidFill>
-                  <a:schemeClr val="accent1"/>
-                </a:solidFill>
-              </a:rPr>
-              <a:t>VersaoAlbum</a:t>
-            </a:r>
-            <a:pPr indent="0" marL="0">
-              <a:buNone/>
-            </a:pPr>
-            <a:r>
-              <a:rPr lang="en-US" sz="1600" dirty="0">
+              <a:t>Um só diagrama com 21 casos de uso tinha linhas cruzadas por todo o lado: dividimos por ator.</a:t>
+            </a:r>
+            <a:endParaRPr lang="en-US" sz="1500" dirty="0"/>
+          </a:p>
+          <a:p>
+            <a:pPr marL="342900" indent="-342900">
+              <a:spcAft>
+                <a:spcPts val="800"/>
+              </a:spcAft>
+              <a:buSzPct val="100000"/>
+              <a:buChar char="•"/>
+            </a:pPr>
+            <a:r>
+              <a:rPr lang="en-US" sz="1500" dirty="0">
                 <a:solidFill>
                   <a:schemeClr val="tx1"/>
                 </a:solidFill>
               </a:rPr>
-              <a:t>: o álbum num suporte concreto, com EAN-13. É o que se compra, coleciona e tem stock.</a:t>
-            </a:r>
-            <a:endParaRPr lang="en-US" sz="1600" dirty="0"/>
+              <a:t>Serviços externos ligados aos casos de uso que os usam: mapas, geocodificação e pagamentos.</a:t>
+            </a:r>
+            <a:endParaRPr lang="en-US" sz="1500" dirty="0"/>
+          </a:p>
+          <a:p>
+            <a:pPr marL="342900" indent="-342900">
+              <a:spcAft>
+                <a:spcPts val="800"/>
+              </a:spcAft>
+              <a:buSzPct val="100000"/>
+              <a:buChar char="•"/>
+            </a:pPr>
+            <a:r>
+              <a:rPr lang="en-US" sz="1500" dirty="0">
+                <a:solidFill>
+                  <a:schemeClr val="tx1"/>
+                </a:solidFill>
+              </a:rPr>
+              <a:t>As 29 user stories estão todas cobertas (matriz US↔UC).</a:t>
+            </a:r>
+            <a:endParaRPr lang="en-US" sz="1500" dirty="0"/>
           </a:p>
         </p:txBody>
       </p:sp>
@@ -5497,7 +6791,7 @@
                   <a:schemeClr val="tx1"/>
                 </a:solidFill>
               </a:rPr>
-              <a:t>Quatro decisões que explicam o modelo</a:t>
+              <a:t>Modelo de dados: 19 classes em 5 grupos</a:t>
             </a:r>
             <a:endParaRPr lang="en-US" sz="3200" dirty="0"/>
           </a:p>
@@ -5591,7 +6885,7 @@
       </p:sp>
       <p:pic>
         <p:nvPicPr>
-          <p:cNvPr id="6" name="diagrama-catalogo" descr="C:\Users\rodri\Desktop\PGP\etapa1\classes\img\02-catalogo.png">    </p:cNvPr>
+          <p:cNvPr id="6" name="diagrama-topo" descr="C:\Users\rodri\Desktop\PGP\etapa1\classes\img\01-topo.png">    </p:cNvPr>
           <p:cNvPicPr>
             <a:picLocks noChangeAspect="1"/>
           </p:cNvPicPr>
@@ -5605,8 +6899,8 @@
         </p:blipFill>
         <p:spPr>
           <a:xfrm>
-            <a:off x="638057" y="1371600"/>
-            <a:ext cx="4027406" cy="4937760"/>
+            <a:off x="2931965" y="1371600"/>
+            <a:ext cx="6297590" cy="4297680"/>
           </a:xfrm>
           <a:prstGeom prst="rect">
             <a:avLst/>
@@ -5622,66 +6916,14 @@
       </p:pic>
       <p:sp>
         <p:nvSpPr>
-          <p:cNvPr id="7" name="cartao"/>
-          <p:cNvSpPr/>
-          <p:nvPr/>
-        </p:nvSpPr>
-        <p:spPr>
-          <a:xfrm>
-            <a:off x="5120640" y="1463040"/>
-            <a:ext cx="3108960" cy="2194560"/>
-          </a:xfrm>
-          <a:prstGeom prst="roundRect">
-            <a:avLst>
-              <a:gd name="adj" fmla="val 3333"/>
-            </a:avLst>
-          </a:prstGeom>
-          <a:solidFill>
-            <a:schemeClr val="bg2"/>
-          </a:solidFill>
-          <a:ln w="12700">
-            <a:solidFill>
-              <a:srgbClr val="E4E4E7"/>
-            </a:solidFill>
-            <a:prstDash val="solid"/>
-          </a:ln>
-        </p:spPr>
-      </p:sp>
-      <p:sp>
-        <p:nvSpPr>
-          <p:cNvPr id="8" name="marca"/>
-          <p:cNvSpPr/>
-          <p:nvPr/>
-        </p:nvSpPr>
-        <p:spPr>
-          <a:xfrm>
-            <a:off x="5349240" y="1719072"/>
-            <a:ext cx="201168" cy="201168"/>
-          </a:xfrm>
-          <a:prstGeom prst="ellipse">
-            <a:avLst/>
-          </a:prstGeom>
-          <a:solidFill>
-            <a:schemeClr val="accent4"/>
-          </a:solidFill>
-          <a:ln w="12700">
-            <a:solidFill>
-              <a:schemeClr val="accent4"/>
-            </a:solidFill>
-            <a:prstDash val="solid"/>
-          </a:ln>
-        </p:spPr>
-      </p:sp>
-      <p:sp>
-        <p:nvSpPr>
-          <p:cNvPr id="9" name="Text 6"/>
+          <p:cNvPr id="7" name="Text 4"/>
           <p:cNvSpPr txBox="1"/>
           <p:nvPr/>
         </p:nvSpPr>
         <p:spPr>
           <a:xfrm>
-            <a:off x="5669280" y="1627632"/>
-            <a:ext cx="2377440" cy="384048"/>
+            <a:off x="548640" y="5760720"/>
+            <a:ext cx="11064240" cy="548640"/>
           </a:xfrm>
           <a:prstGeom prst="rect">
             <a:avLst/>
@@ -5697,420 +6939,34 @@
               <a:buNone/>
             </a:pPr>
             <a:r>
-              <a:rPr lang="en-US" sz="1600" b="1" dirty="0">
+              <a:rPr lang="en-US" sz="1600" dirty="0">
                 <a:solidFill>
                   <a:schemeClr val="tx1"/>
                 </a:solidFill>
               </a:rPr>
-              <a:t>Solista e Grupo</a:t>
-            </a:r>
-            <a:endParaRPr lang="en-US" sz="1600" dirty="0"/>
-          </a:p>
-        </p:txBody>
-      </p:sp>
-      <p:sp>
-        <p:nvSpPr>
-          <p:cNvPr id="10" name="Text 7"/>
-          <p:cNvSpPr txBox="1"/>
-          <p:nvPr/>
-        </p:nvSpPr>
-        <p:spPr>
-          <a:xfrm>
-            <a:off x="5669280" y="2029968"/>
-            <a:ext cx="2377440" cy="1508760"/>
-          </a:xfrm>
-          <a:prstGeom prst="rect">
-            <a:avLst/>
-          </a:prstGeom>
-          <a:noFill/>
-          <a:ln/>
-        </p:spPr>
-        <p:txBody>
-          <a:bodyPr wrap="square" lIns="0" tIns="0" rIns="0" bIns="0" rtlCol="0" anchor="t"/>
-          <a:lstStyle/>
-          <a:p>
+              <a:t>A classe central é a </a:t>
+            </a:r>
             <a:pPr indent="0" marL="0">
               <a:buNone/>
             </a:pPr>
             <a:r>
-              <a:rPr lang="en-US" sz="1600" dirty="0">
-                <a:solidFill>
-                  <a:schemeClr val="tx2"/>
-                </a:solidFill>
-              </a:rPr>
-              <a:t>Subclasses de Artista. Os membros de um grupo só podem ser solistas, por isso um grupo nunca contém grupos.</a:t>
-            </a:r>
-            <a:endParaRPr lang="en-US" sz="1600" dirty="0"/>
-          </a:p>
-        </p:txBody>
-      </p:sp>
-      <p:sp>
-        <p:nvSpPr>
-          <p:cNvPr id="11" name="cartao"/>
-          <p:cNvSpPr/>
-          <p:nvPr/>
-        </p:nvSpPr>
-        <p:spPr>
-          <a:xfrm>
-            <a:off x="8503920" y="1463040"/>
-            <a:ext cx="3108960" cy="2194560"/>
-          </a:xfrm>
-          <a:prstGeom prst="roundRect">
-            <a:avLst>
-              <a:gd name="adj" fmla="val 3333"/>
-            </a:avLst>
-          </a:prstGeom>
-          <a:solidFill>
-            <a:schemeClr val="bg2"/>
-          </a:solidFill>
-          <a:ln w="12700">
-            <a:solidFill>
-              <a:srgbClr val="E4E4E7"/>
-            </a:solidFill>
-            <a:prstDash val="solid"/>
-          </a:ln>
-        </p:spPr>
-      </p:sp>
-      <p:sp>
-        <p:nvSpPr>
-          <p:cNvPr id="12" name="marca"/>
-          <p:cNvSpPr/>
-          <p:nvPr/>
-        </p:nvSpPr>
-        <p:spPr>
-          <a:xfrm>
-            <a:off x="8732520" y="1719072"/>
-            <a:ext cx="201168" cy="201168"/>
-          </a:xfrm>
-          <a:prstGeom prst="ellipse">
-            <a:avLst/>
-          </a:prstGeom>
-          <a:solidFill>
-            <a:schemeClr val="accent4"/>
-          </a:solidFill>
-          <a:ln w="12700">
-            <a:solidFill>
-              <a:schemeClr val="accent4"/>
-            </a:solidFill>
-            <a:prstDash val="solid"/>
-          </a:ln>
-        </p:spPr>
-      </p:sp>
-      <p:sp>
-        <p:nvSpPr>
-          <p:cNvPr id="13" name="Text 10"/>
-          <p:cNvSpPr txBox="1"/>
-          <p:nvPr/>
-        </p:nvSpPr>
-        <p:spPr>
-          <a:xfrm>
-            <a:off x="9052560" y="1627632"/>
-            <a:ext cx="2377440" cy="384048"/>
-          </a:xfrm>
-          <a:prstGeom prst="rect">
-            <a:avLst/>
-          </a:prstGeom>
-          <a:noFill/>
-          <a:ln/>
-        </p:spPr>
-        <p:txBody>
-          <a:bodyPr wrap="square" lIns="0" tIns="0" rIns="0" bIns="0" rtlCol="0" anchor="ctr"/>
-          <a:lstStyle/>
-          <a:p>
+              <a:rPr lang="en-US" sz="1600" b="1" dirty="0">
+                <a:solidFill>
+                  <a:schemeClr val="accent1"/>
+                </a:solidFill>
+              </a:rPr>
+              <a:t>VersaoAlbum</a:t>
+            </a:r>
             <a:pPr indent="0" marL="0">
               <a:buNone/>
             </a:pPr>
             <a:r>
-              <a:rPr lang="en-US" sz="1600" b="1" dirty="0">
+              <a:rPr lang="en-US" sz="1600" dirty="0">
                 <a:solidFill>
                   <a:schemeClr val="tx1"/>
                 </a:solidFill>
               </a:rPr>
-              <a:t>Faixa</a:t>
-            </a:r>
-            <a:endParaRPr lang="en-US" sz="1600" dirty="0"/>
-          </a:p>
-        </p:txBody>
-      </p:sp>
-      <p:sp>
-        <p:nvSpPr>
-          <p:cNvPr id="14" name="Text 11"/>
-          <p:cNvSpPr txBox="1"/>
-          <p:nvPr/>
-        </p:nvSpPr>
-        <p:spPr>
-          <a:xfrm>
-            <a:off x="9052560" y="2029968"/>
-            <a:ext cx="2377440" cy="1508760"/>
-          </a:xfrm>
-          <a:prstGeom prst="rect">
-            <a:avLst/>
-          </a:prstGeom>
-          <a:noFill/>
-          <a:ln/>
-        </p:spPr>
-        <p:txBody>
-          <a:bodyPr wrap="square" lIns="0" tIns="0" rIns="0" bIns="0" rtlCol="0" anchor="t"/>
-          <a:lstStyle/>
-          <a:p>
-            <a:pPr indent="0" marL="0">
-              <a:buNone/>
-            </a:pPr>
-            <a:r>
-              <a:rPr lang="en-US" sz="1600" dirty="0">
-                <a:solidFill>
-                  <a:schemeClr val="tx2"/>
-                </a:solidFill>
-              </a:rPr>
-              <a:t>Classe própria: a mesma canção aparece em vários álbuns, com números diferentes.</a:t>
-            </a:r>
-            <a:endParaRPr lang="en-US" sz="1600" dirty="0"/>
-          </a:p>
-        </p:txBody>
-      </p:sp>
-      <p:sp>
-        <p:nvSpPr>
-          <p:cNvPr id="15" name="cartao"/>
-          <p:cNvSpPr/>
-          <p:nvPr/>
-        </p:nvSpPr>
-        <p:spPr>
-          <a:xfrm>
-            <a:off x="5120640" y="3931920"/>
-            <a:ext cx="3108960" cy="2194560"/>
-          </a:xfrm>
-          <a:prstGeom prst="roundRect">
-            <a:avLst>
-              <a:gd name="adj" fmla="val 3333"/>
-            </a:avLst>
-          </a:prstGeom>
-          <a:solidFill>
-            <a:schemeClr val="bg2"/>
-          </a:solidFill>
-          <a:ln w="12700">
-            <a:solidFill>
-              <a:srgbClr val="E4E4E7"/>
-            </a:solidFill>
-            <a:prstDash val="solid"/>
-          </a:ln>
-        </p:spPr>
-      </p:sp>
-      <p:sp>
-        <p:nvSpPr>
-          <p:cNvPr id="16" name="marca"/>
-          <p:cNvSpPr/>
-          <p:nvPr/>
-        </p:nvSpPr>
-        <p:spPr>
-          <a:xfrm>
-            <a:off x="5349240" y="4187952"/>
-            <a:ext cx="201168" cy="201168"/>
-          </a:xfrm>
-          <a:prstGeom prst="ellipse">
-            <a:avLst/>
-          </a:prstGeom>
-          <a:solidFill>
-            <a:schemeClr val="accent3"/>
-          </a:solidFill>
-          <a:ln w="12700">
-            <a:solidFill>
-              <a:schemeClr val="accent3"/>
-            </a:solidFill>
-            <a:prstDash val="solid"/>
-          </a:ln>
-        </p:spPr>
-      </p:sp>
-      <p:sp>
-        <p:nvSpPr>
-          <p:cNvPr id="17" name="Text 14"/>
-          <p:cNvSpPr txBox="1"/>
-          <p:nvPr/>
-        </p:nvSpPr>
-        <p:spPr>
-          <a:xfrm>
-            <a:off x="5669280" y="4096512"/>
-            <a:ext cx="2377440" cy="384048"/>
-          </a:xfrm>
-          <a:prstGeom prst="rect">
-            <a:avLst/>
-          </a:prstGeom>
-          <a:noFill/>
-          <a:ln/>
-        </p:spPr>
-        <p:txBody>
-          <a:bodyPr wrap="square" lIns="0" tIns="0" rIns="0" bIns="0" rtlCol="0" anchor="ctr"/>
-          <a:lstStyle/>
-          <a:p>
-            <a:pPr indent="0" marL="0">
-              <a:buNone/>
-            </a:pPr>
-            <a:r>
-              <a:rPr lang="en-US" sz="1600" b="1" dirty="0">
-                <a:solidFill>
-                  <a:schemeClr val="tx1"/>
-                </a:solidFill>
-              </a:rPr>
-              <a:t>Versão ≠ Álbum</a:t>
-            </a:r>
-            <a:endParaRPr lang="en-US" sz="1600" dirty="0"/>
-          </a:p>
-        </p:txBody>
-      </p:sp>
-      <p:sp>
-        <p:nvSpPr>
-          <p:cNvPr id="18" name="Text 15"/>
-          <p:cNvSpPr txBox="1"/>
-          <p:nvPr/>
-        </p:nvSpPr>
-        <p:spPr>
-          <a:xfrm>
-            <a:off x="5669280" y="4498848"/>
-            <a:ext cx="2377440" cy="1508760"/>
-          </a:xfrm>
-          <a:prstGeom prst="rect">
-            <a:avLst/>
-          </a:prstGeom>
-          <a:noFill/>
-          <a:ln/>
-        </p:spPr>
-        <p:txBody>
-          <a:bodyPr wrap="square" lIns="0" tIns="0" rIns="0" bIns="0" rtlCol="0" anchor="t"/>
-          <a:lstStyle/>
-          <a:p>
-            <a:pPr indent="0" marL="0">
-              <a:buNone/>
-            </a:pPr>
-            <a:r>
-              <a:rPr lang="en-US" sz="1600" dirty="0">
-                <a:solidFill>
-                  <a:schemeClr val="tx2"/>
-                </a:solidFill>
-              </a:rPr>
-              <a:t>O mesmo álbum existe em CD, vinil e várias edições. Coleção e carrinho guardam versões; listas guardam álbuns.</a:t>
-            </a:r>
-            <a:endParaRPr lang="en-US" sz="1600" dirty="0"/>
-          </a:p>
-        </p:txBody>
-      </p:sp>
-      <p:sp>
-        <p:nvSpPr>
-          <p:cNvPr id="19" name="cartao"/>
-          <p:cNvSpPr/>
-          <p:nvPr/>
-        </p:nvSpPr>
-        <p:spPr>
-          <a:xfrm>
-            <a:off x="8503920" y="3931920"/>
-            <a:ext cx="3108960" cy="2194560"/>
-          </a:xfrm>
-          <a:prstGeom prst="roundRect">
-            <a:avLst>
-              <a:gd name="adj" fmla="val 3333"/>
-            </a:avLst>
-          </a:prstGeom>
-          <a:solidFill>
-            <a:schemeClr val="bg2"/>
-          </a:solidFill>
-          <a:ln w="12700">
-            <a:solidFill>
-              <a:srgbClr val="E4E4E7"/>
-            </a:solidFill>
-            <a:prstDash val="solid"/>
-          </a:ln>
-        </p:spPr>
-      </p:sp>
-      <p:sp>
-        <p:nvSpPr>
-          <p:cNvPr id="20" name="marca"/>
-          <p:cNvSpPr/>
-          <p:nvPr/>
-        </p:nvSpPr>
-        <p:spPr>
-          <a:xfrm>
-            <a:off x="8732520" y="4187952"/>
-            <a:ext cx="201168" cy="201168"/>
-          </a:xfrm>
-          <a:prstGeom prst="ellipse">
-            <a:avLst/>
-          </a:prstGeom>
-          <a:solidFill>
-            <a:schemeClr val="accent3"/>
-          </a:solidFill>
-          <a:ln w="12700">
-            <a:solidFill>
-              <a:schemeClr val="accent3"/>
-            </a:solidFill>
-            <a:prstDash val="solid"/>
-          </a:ln>
-        </p:spPr>
-      </p:sp>
-      <p:sp>
-        <p:nvSpPr>
-          <p:cNvPr id="21" name="Text 18"/>
-          <p:cNvSpPr txBox="1"/>
-          <p:nvPr/>
-        </p:nvSpPr>
-        <p:spPr>
-          <a:xfrm>
-            <a:off x="9052560" y="4096512"/>
-            <a:ext cx="2377440" cy="384048"/>
-          </a:xfrm>
-          <a:prstGeom prst="rect">
-            <a:avLst/>
-          </a:prstGeom>
-          <a:noFill/>
-          <a:ln/>
-        </p:spPr>
-        <p:txBody>
-          <a:bodyPr wrap="square" lIns="0" tIns="0" rIns="0" bIns="0" rtlCol="0" anchor="ctr"/>
-          <a:lstStyle/>
-          <a:p>
-            <a:pPr indent="0" marL="0">
-              <a:buNone/>
-            </a:pPr>
-            <a:r>
-              <a:rPr lang="en-US" sz="1600" b="1" dirty="0">
-                <a:solidFill>
-                  <a:schemeClr val="tx1"/>
-                </a:solidFill>
-              </a:rPr>
-              <a:t>Disponibilidade</a:t>
-            </a:r>
-            <a:endParaRPr lang="en-US" sz="1600" dirty="0"/>
-          </a:p>
-        </p:txBody>
-      </p:sp>
-      <p:sp>
-        <p:nvSpPr>
-          <p:cNvPr id="22" name="Text 19"/>
-          <p:cNvSpPr txBox="1"/>
-          <p:nvPr/>
-        </p:nvSpPr>
-        <p:spPr>
-          <a:xfrm>
-            <a:off x="9052560" y="4498848"/>
-            <a:ext cx="2377440" cy="1508760"/>
-          </a:xfrm>
-          <a:prstGeom prst="rect">
-            <a:avLst/>
-          </a:prstGeom>
-          <a:noFill/>
-          <a:ln/>
-        </p:spPr>
-        <p:txBody>
-          <a:bodyPr wrap="square" lIns="0" tIns="0" rIns="0" bIns="0" rtlCol="0" anchor="t"/>
-          <a:lstStyle/>
-          <a:p>
-            <a:pPr indent="0" marL="0">
-              <a:buNone/>
-            </a:pPr>
-            <a:r>
-              <a:rPr lang="en-US" sz="1600" dirty="0">
-                <a:solidFill>
-                  <a:schemeClr val="tx2"/>
-                </a:solidFill>
-              </a:rPr>
-              <a:t>Opcional: distingue "nunca esteve na loja", "disponível" e "esgotado".</a:t>
+              <a:t>: o álbum num suporte concreto, com EAN-13. É o que se compra, coleciona e tem stock.</a:t>
             </a:r>
             <a:endParaRPr lang="en-US" sz="1600" dirty="0"/>
           </a:p>
@@ -6218,7 +7074,7 @@
                   <a:schemeClr val="tx1"/>
                 </a:solidFill>
               </a:rPr>
-              <a:t>Restrições de integridade</a:t>
+              <a:t>Quatro decisões que explicam o modelo</a:t>
             </a:r>
             <a:endParaRPr lang="en-US" sz="3200" dirty="0"/>
           </a:p>
@@ -6304,6 +7160,727 @@
                   <a:schemeClr val="tx2"/>
                 </a:solidFill>
               </a:rPr>
+              <a:t>Rodrigo</a:t>
+            </a:r>
+            <a:endParaRPr lang="en-US" sz="1200" dirty="0"/>
+          </a:p>
+        </p:txBody>
+      </p:sp>
+      <p:pic>
+        <p:nvPicPr>
+          <p:cNvPr id="6" name="diagrama-catalogo" descr="C:\Users\rodri\Desktop\PGP\etapa1\classes\img\02-catalogo.png">    </p:cNvPr>
+          <p:cNvPicPr>
+            <a:picLocks noChangeAspect="1"/>
+          </p:cNvPicPr>
+          <p:nvPr/>
+        </p:nvPicPr>
+        <p:blipFill>
+          <a:blip r:embed="rId1"/>
+          <a:stretch>
+            <a:fillRect/>
+          </a:stretch>
+        </p:blipFill>
+        <p:spPr>
+          <a:xfrm>
+            <a:off x="638057" y="1371600"/>
+            <a:ext cx="4027406" cy="4937760"/>
+          </a:xfrm>
+          <a:prstGeom prst="rect">
+            <a:avLst/>
+          </a:prstGeom>
+          <a:effectLst>
+            <a:outerShdw sx="100000" sy="100000" kx="0" ky="0" algn="bl" rotWithShape="0" blurRad="76200" dist="25400" dir="5400000">
+              <a:srgbClr val="000000">
+                <a:alpha val="18000"/>
+              </a:srgbClr>
+            </a:outerShdw>
+          </a:effectLst>
+        </p:spPr>
+      </p:pic>
+      <p:sp>
+        <p:nvSpPr>
+          <p:cNvPr id="7" name="cartao"/>
+          <p:cNvSpPr/>
+          <p:nvPr/>
+        </p:nvSpPr>
+        <p:spPr>
+          <a:xfrm>
+            <a:off x="5120640" y="1463040"/>
+            <a:ext cx="3108960" cy="2194560"/>
+          </a:xfrm>
+          <a:prstGeom prst="roundRect">
+            <a:avLst>
+              <a:gd name="adj" fmla="val 3333"/>
+            </a:avLst>
+          </a:prstGeom>
+          <a:solidFill>
+            <a:schemeClr val="bg2"/>
+          </a:solidFill>
+          <a:ln w="12700">
+            <a:solidFill>
+              <a:srgbClr val="E4E4E7"/>
+            </a:solidFill>
+            <a:prstDash val="solid"/>
+          </a:ln>
+        </p:spPr>
+      </p:sp>
+      <p:sp>
+        <p:nvSpPr>
+          <p:cNvPr id="8" name="marca"/>
+          <p:cNvSpPr/>
+          <p:nvPr/>
+        </p:nvSpPr>
+        <p:spPr>
+          <a:xfrm>
+            <a:off x="5349240" y="1719072"/>
+            <a:ext cx="201168" cy="201168"/>
+          </a:xfrm>
+          <a:prstGeom prst="ellipse">
+            <a:avLst/>
+          </a:prstGeom>
+          <a:solidFill>
+            <a:schemeClr val="accent4"/>
+          </a:solidFill>
+          <a:ln w="12700">
+            <a:solidFill>
+              <a:schemeClr val="accent4"/>
+            </a:solidFill>
+            <a:prstDash val="solid"/>
+          </a:ln>
+        </p:spPr>
+      </p:sp>
+      <p:sp>
+        <p:nvSpPr>
+          <p:cNvPr id="9" name="Text 6"/>
+          <p:cNvSpPr txBox="1"/>
+          <p:nvPr/>
+        </p:nvSpPr>
+        <p:spPr>
+          <a:xfrm>
+            <a:off x="5669280" y="1627632"/>
+            <a:ext cx="2377440" cy="384048"/>
+          </a:xfrm>
+          <a:prstGeom prst="rect">
+            <a:avLst/>
+          </a:prstGeom>
+          <a:noFill/>
+          <a:ln/>
+        </p:spPr>
+        <p:txBody>
+          <a:bodyPr wrap="square" lIns="0" tIns="0" rIns="0" bIns="0" rtlCol="0" anchor="ctr"/>
+          <a:lstStyle/>
+          <a:p>
+            <a:pPr indent="0" marL="0">
+              <a:buNone/>
+            </a:pPr>
+            <a:r>
+              <a:rPr lang="en-US" sz="1600" b="1" dirty="0">
+                <a:solidFill>
+                  <a:schemeClr val="tx1"/>
+                </a:solidFill>
+              </a:rPr>
+              <a:t>Solista e Grupo</a:t>
+            </a:r>
+            <a:endParaRPr lang="en-US" sz="1600" dirty="0"/>
+          </a:p>
+        </p:txBody>
+      </p:sp>
+      <p:sp>
+        <p:nvSpPr>
+          <p:cNvPr id="10" name="Text 7"/>
+          <p:cNvSpPr txBox="1"/>
+          <p:nvPr/>
+        </p:nvSpPr>
+        <p:spPr>
+          <a:xfrm>
+            <a:off x="5669280" y="2029968"/>
+            <a:ext cx="2377440" cy="1508760"/>
+          </a:xfrm>
+          <a:prstGeom prst="rect">
+            <a:avLst/>
+          </a:prstGeom>
+          <a:noFill/>
+          <a:ln/>
+        </p:spPr>
+        <p:txBody>
+          <a:bodyPr wrap="square" lIns="0" tIns="0" rIns="0" bIns="0" rtlCol="0" anchor="t"/>
+          <a:lstStyle/>
+          <a:p>
+            <a:pPr indent="0" marL="0">
+              <a:buNone/>
+            </a:pPr>
+            <a:r>
+              <a:rPr lang="en-US" sz="1600" dirty="0">
+                <a:solidFill>
+                  <a:schemeClr val="tx2"/>
+                </a:solidFill>
+              </a:rPr>
+              <a:t>Subclasses de Artista. Os membros de um grupo só podem ser solistas, por isso um grupo nunca contém grupos.</a:t>
+            </a:r>
+            <a:endParaRPr lang="en-US" sz="1600" dirty="0"/>
+          </a:p>
+        </p:txBody>
+      </p:sp>
+      <p:sp>
+        <p:nvSpPr>
+          <p:cNvPr id="11" name="cartao"/>
+          <p:cNvSpPr/>
+          <p:nvPr/>
+        </p:nvSpPr>
+        <p:spPr>
+          <a:xfrm>
+            <a:off x="8503920" y="1463040"/>
+            <a:ext cx="3108960" cy="2194560"/>
+          </a:xfrm>
+          <a:prstGeom prst="roundRect">
+            <a:avLst>
+              <a:gd name="adj" fmla="val 3333"/>
+            </a:avLst>
+          </a:prstGeom>
+          <a:solidFill>
+            <a:schemeClr val="bg2"/>
+          </a:solidFill>
+          <a:ln w="12700">
+            <a:solidFill>
+              <a:srgbClr val="E4E4E7"/>
+            </a:solidFill>
+            <a:prstDash val="solid"/>
+          </a:ln>
+        </p:spPr>
+      </p:sp>
+      <p:sp>
+        <p:nvSpPr>
+          <p:cNvPr id="12" name="marca"/>
+          <p:cNvSpPr/>
+          <p:nvPr/>
+        </p:nvSpPr>
+        <p:spPr>
+          <a:xfrm>
+            <a:off x="8732520" y="1719072"/>
+            <a:ext cx="201168" cy="201168"/>
+          </a:xfrm>
+          <a:prstGeom prst="ellipse">
+            <a:avLst/>
+          </a:prstGeom>
+          <a:solidFill>
+            <a:schemeClr val="accent4"/>
+          </a:solidFill>
+          <a:ln w="12700">
+            <a:solidFill>
+              <a:schemeClr val="accent4"/>
+            </a:solidFill>
+            <a:prstDash val="solid"/>
+          </a:ln>
+        </p:spPr>
+      </p:sp>
+      <p:sp>
+        <p:nvSpPr>
+          <p:cNvPr id="13" name="Text 10"/>
+          <p:cNvSpPr txBox="1"/>
+          <p:nvPr/>
+        </p:nvSpPr>
+        <p:spPr>
+          <a:xfrm>
+            <a:off x="9052560" y="1627632"/>
+            <a:ext cx="2377440" cy="384048"/>
+          </a:xfrm>
+          <a:prstGeom prst="rect">
+            <a:avLst/>
+          </a:prstGeom>
+          <a:noFill/>
+          <a:ln/>
+        </p:spPr>
+        <p:txBody>
+          <a:bodyPr wrap="square" lIns="0" tIns="0" rIns="0" bIns="0" rtlCol="0" anchor="ctr"/>
+          <a:lstStyle/>
+          <a:p>
+            <a:pPr indent="0" marL="0">
+              <a:buNone/>
+            </a:pPr>
+            <a:r>
+              <a:rPr lang="en-US" sz="1600" b="1" dirty="0">
+                <a:solidFill>
+                  <a:schemeClr val="tx1"/>
+                </a:solidFill>
+              </a:rPr>
+              <a:t>Faixa</a:t>
+            </a:r>
+            <a:endParaRPr lang="en-US" sz="1600" dirty="0"/>
+          </a:p>
+        </p:txBody>
+      </p:sp>
+      <p:sp>
+        <p:nvSpPr>
+          <p:cNvPr id="14" name="Text 11"/>
+          <p:cNvSpPr txBox="1"/>
+          <p:nvPr/>
+        </p:nvSpPr>
+        <p:spPr>
+          <a:xfrm>
+            <a:off x="9052560" y="2029968"/>
+            <a:ext cx="2377440" cy="1508760"/>
+          </a:xfrm>
+          <a:prstGeom prst="rect">
+            <a:avLst/>
+          </a:prstGeom>
+          <a:noFill/>
+          <a:ln/>
+        </p:spPr>
+        <p:txBody>
+          <a:bodyPr wrap="square" lIns="0" tIns="0" rIns="0" bIns="0" rtlCol="0" anchor="t"/>
+          <a:lstStyle/>
+          <a:p>
+            <a:pPr indent="0" marL="0">
+              <a:buNone/>
+            </a:pPr>
+            <a:r>
+              <a:rPr lang="en-US" sz="1600" dirty="0">
+                <a:solidFill>
+                  <a:schemeClr val="tx2"/>
+                </a:solidFill>
+              </a:rPr>
+              <a:t>Classe própria: a mesma canção aparece em vários álbuns, com números diferentes.</a:t>
+            </a:r>
+            <a:endParaRPr lang="en-US" sz="1600" dirty="0"/>
+          </a:p>
+        </p:txBody>
+      </p:sp>
+      <p:sp>
+        <p:nvSpPr>
+          <p:cNvPr id="15" name="cartao"/>
+          <p:cNvSpPr/>
+          <p:nvPr/>
+        </p:nvSpPr>
+        <p:spPr>
+          <a:xfrm>
+            <a:off x="5120640" y="3931920"/>
+            <a:ext cx="3108960" cy="2194560"/>
+          </a:xfrm>
+          <a:prstGeom prst="roundRect">
+            <a:avLst>
+              <a:gd name="adj" fmla="val 3333"/>
+            </a:avLst>
+          </a:prstGeom>
+          <a:solidFill>
+            <a:schemeClr val="bg2"/>
+          </a:solidFill>
+          <a:ln w="12700">
+            <a:solidFill>
+              <a:srgbClr val="E4E4E7"/>
+            </a:solidFill>
+            <a:prstDash val="solid"/>
+          </a:ln>
+        </p:spPr>
+      </p:sp>
+      <p:sp>
+        <p:nvSpPr>
+          <p:cNvPr id="16" name="marca"/>
+          <p:cNvSpPr/>
+          <p:nvPr/>
+        </p:nvSpPr>
+        <p:spPr>
+          <a:xfrm>
+            <a:off x="5349240" y="4187952"/>
+            <a:ext cx="201168" cy="201168"/>
+          </a:xfrm>
+          <a:prstGeom prst="ellipse">
+            <a:avLst/>
+          </a:prstGeom>
+          <a:solidFill>
+            <a:schemeClr val="accent3"/>
+          </a:solidFill>
+          <a:ln w="12700">
+            <a:solidFill>
+              <a:schemeClr val="accent3"/>
+            </a:solidFill>
+            <a:prstDash val="solid"/>
+          </a:ln>
+        </p:spPr>
+      </p:sp>
+      <p:sp>
+        <p:nvSpPr>
+          <p:cNvPr id="17" name="Text 14"/>
+          <p:cNvSpPr txBox="1"/>
+          <p:nvPr/>
+        </p:nvSpPr>
+        <p:spPr>
+          <a:xfrm>
+            <a:off x="5669280" y="4096512"/>
+            <a:ext cx="2377440" cy="384048"/>
+          </a:xfrm>
+          <a:prstGeom prst="rect">
+            <a:avLst/>
+          </a:prstGeom>
+          <a:noFill/>
+          <a:ln/>
+        </p:spPr>
+        <p:txBody>
+          <a:bodyPr wrap="square" lIns="0" tIns="0" rIns="0" bIns="0" rtlCol="0" anchor="ctr"/>
+          <a:lstStyle/>
+          <a:p>
+            <a:pPr indent="0" marL="0">
+              <a:buNone/>
+            </a:pPr>
+            <a:r>
+              <a:rPr lang="en-US" sz="1600" b="1" dirty="0">
+                <a:solidFill>
+                  <a:schemeClr val="tx1"/>
+                </a:solidFill>
+              </a:rPr>
+              <a:t>Versão ≠ Álbum</a:t>
+            </a:r>
+            <a:endParaRPr lang="en-US" sz="1600" dirty="0"/>
+          </a:p>
+        </p:txBody>
+      </p:sp>
+      <p:sp>
+        <p:nvSpPr>
+          <p:cNvPr id="18" name="Text 15"/>
+          <p:cNvSpPr txBox="1"/>
+          <p:nvPr/>
+        </p:nvSpPr>
+        <p:spPr>
+          <a:xfrm>
+            <a:off x="5669280" y="4498848"/>
+            <a:ext cx="2377440" cy="1508760"/>
+          </a:xfrm>
+          <a:prstGeom prst="rect">
+            <a:avLst/>
+          </a:prstGeom>
+          <a:noFill/>
+          <a:ln/>
+        </p:spPr>
+        <p:txBody>
+          <a:bodyPr wrap="square" lIns="0" tIns="0" rIns="0" bIns="0" rtlCol="0" anchor="t"/>
+          <a:lstStyle/>
+          <a:p>
+            <a:pPr indent="0" marL="0">
+              <a:buNone/>
+            </a:pPr>
+            <a:r>
+              <a:rPr lang="en-US" sz="1600" dirty="0">
+                <a:solidFill>
+                  <a:schemeClr val="tx2"/>
+                </a:solidFill>
+              </a:rPr>
+              <a:t>O mesmo álbum existe em CD, vinil e várias edições. Coleção e carrinho guardam versões; listas guardam álbuns.</a:t>
+            </a:r>
+            <a:endParaRPr lang="en-US" sz="1600" dirty="0"/>
+          </a:p>
+        </p:txBody>
+      </p:sp>
+      <p:sp>
+        <p:nvSpPr>
+          <p:cNvPr id="19" name="cartao"/>
+          <p:cNvSpPr/>
+          <p:nvPr/>
+        </p:nvSpPr>
+        <p:spPr>
+          <a:xfrm>
+            <a:off x="8503920" y="3931920"/>
+            <a:ext cx="3108960" cy="2194560"/>
+          </a:xfrm>
+          <a:prstGeom prst="roundRect">
+            <a:avLst>
+              <a:gd name="adj" fmla="val 3333"/>
+            </a:avLst>
+          </a:prstGeom>
+          <a:solidFill>
+            <a:schemeClr val="bg2"/>
+          </a:solidFill>
+          <a:ln w="12700">
+            <a:solidFill>
+              <a:srgbClr val="E4E4E7"/>
+            </a:solidFill>
+            <a:prstDash val="solid"/>
+          </a:ln>
+        </p:spPr>
+      </p:sp>
+      <p:sp>
+        <p:nvSpPr>
+          <p:cNvPr id="20" name="marca"/>
+          <p:cNvSpPr/>
+          <p:nvPr/>
+        </p:nvSpPr>
+        <p:spPr>
+          <a:xfrm>
+            <a:off x="8732520" y="4187952"/>
+            <a:ext cx="201168" cy="201168"/>
+          </a:xfrm>
+          <a:prstGeom prst="ellipse">
+            <a:avLst/>
+          </a:prstGeom>
+          <a:solidFill>
+            <a:schemeClr val="accent3"/>
+          </a:solidFill>
+          <a:ln w="12700">
+            <a:solidFill>
+              <a:schemeClr val="accent3"/>
+            </a:solidFill>
+            <a:prstDash val="solid"/>
+          </a:ln>
+        </p:spPr>
+      </p:sp>
+      <p:sp>
+        <p:nvSpPr>
+          <p:cNvPr id="21" name="Text 18"/>
+          <p:cNvSpPr txBox="1"/>
+          <p:nvPr/>
+        </p:nvSpPr>
+        <p:spPr>
+          <a:xfrm>
+            <a:off x="9052560" y="4096512"/>
+            <a:ext cx="2377440" cy="384048"/>
+          </a:xfrm>
+          <a:prstGeom prst="rect">
+            <a:avLst/>
+          </a:prstGeom>
+          <a:noFill/>
+          <a:ln/>
+        </p:spPr>
+        <p:txBody>
+          <a:bodyPr wrap="square" lIns="0" tIns="0" rIns="0" bIns="0" rtlCol="0" anchor="ctr"/>
+          <a:lstStyle/>
+          <a:p>
+            <a:pPr indent="0" marL="0">
+              <a:buNone/>
+            </a:pPr>
+            <a:r>
+              <a:rPr lang="en-US" sz="1600" b="1" dirty="0">
+                <a:solidFill>
+                  <a:schemeClr val="tx1"/>
+                </a:solidFill>
+              </a:rPr>
+              <a:t>Disponibilidade</a:t>
+            </a:r>
+            <a:endParaRPr lang="en-US" sz="1600" dirty="0"/>
+          </a:p>
+        </p:txBody>
+      </p:sp>
+      <p:sp>
+        <p:nvSpPr>
+          <p:cNvPr id="22" name="Text 19"/>
+          <p:cNvSpPr txBox="1"/>
+          <p:nvPr/>
+        </p:nvSpPr>
+        <p:spPr>
+          <a:xfrm>
+            <a:off x="9052560" y="4498848"/>
+            <a:ext cx="2377440" cy="1508760"/>
+          </a:xfrm>
+          <a:prstGeom prst="rect">
+            <a:avLst/>
+          </a:prstGeom>
+          <a:noFill/>
+          <a:ln/>
+        </p:spPr>
+        <p:txBody>
+          <a:bodyPr wrap="square" lIns="0" tIns="0" rIns="0" bIns="0" rtlCol="0" anchor="t"/>
+          <a:lstStyle/>
+          <a:p>
+            <a:pPr indent="0" marL="0">
+              <a:buNone/>
+            </a:pPr>
+            <a:r>
+              <a:rPr lang="en-US" sz="1600" dirty="0">
+                <a:solidFill>
+                  <a:schemeClr val="tx2"/>
+                </a:solidFill>
+              </a:rPr>
+              <a:t>Opcional: distingue "nunca esteve na loja", "disponível" e "esgotado".</a:t>
+            </a:r>
+            <a:endParaRPr lang="en-US" sz="1600" dirty="0"/>
+          </a:p>
+        </p:txBody>
+      </p:sp>
+      <p:sp>
+        <p:nvSpPr>
+          <p:cNvPr id="25" name="Slide Number Placeholder 0"/>
+          <p:cNvSpPr>
+            <a:spLocks noGrp="1"/>
+          </p:cNvSpPr>
+          <p:nvPr>
+            <p:ph type="sldNum" sz="quarter" idx="4294967295"/>
+          </p:nvPr>
+        </p:nvSpPr>
+        <p:spPr>
+          <a:xfrm>
+            <a:off x="11247120" y="6446520"/>
+            <a:ext cx="457200" cy="274320"/>
+          </a:xfrm>
+          <a:prstGeom prst="rect">
+            <a:avLst/>
+          </a:prstGeom>
+          <a:extLst>
+            <a:ext uri="{C572A759-6A51-4108-AA02-DFA0A04FC94B}">
+              <ma14:wrappingTextBoxFlag xmlns:ma14="http://schemas.microsoft.com/office/mac/drawingml/2011/main" val="0"/>
+            </a:ext>
+          </a:extLst>
+        </p:spPr>
+        <p:txBody>
+          <a:bodyPr/>
+          <a:lstStyle>
+            <a:lvl1pPr>
+              <a:defRPr sz="1000">
+                <a:solidFill>
+                  <a:srgbClr val="71717A"/>
+                </a:solidFill>
+              </a:defRPr>
+            </a:lvl1pPr>
+          </a:lstStyle>
+          <a:p>
+            <a:pPr algn="r"/>
+            <a:fld id="{F7021451-1387-4CA6-816F-3879F97B5CBC}" type="slidenum">
+              <a:rPr b="0" lang="en-US"/>
+              <a:t>6</a:t>
+            </a:fld>
+            <a:endParaRPr lang="en-US"/>
+          </a:p>
+        </p:txBody>
+      </p:sp>
+    </p:spTree>
+  </p:cSld>
+  <p:clrMapOvr>
+    <a:masterClrMapping/>
+  </p:clrMapOvr>
+</p:sld>
+</file>
+
+<file path=ppt/slides/slide7.xml><?xml version="1.0" encoding="utf-8"?>
+<p:sld xmlns:a="http://schemas.openxmlformats.org/drawingml/2006/main" xmlns:r="http://schemas.openxmlformats.org/officeDocument/2006/relationships" xmlns:p="http://schemas.openxmlformats.org/presentationml/2006/main">
+  <p:cSld name="Slide 7">
+    <p:spTree>
+      <p:nvGrpSpPr>
+        <p:cNvPr id="1" name=""/>
+        <p:cNvGrpSpPr/>
+        <p:nvPr/>
+      </p:nvGrpSpPr>
+      <p:grpSpPr>
+        <a:xfrm>
+          <a:off x="0" y="0"/>
+          <a:ext cx="0" cy="0"/>
+          <a:chOff x="0" y="0"/>
+          <a:chExt cx="0" cy="0"/>
+        </a:xfrm>
+      </p:grpSpPr>
+      <p:sp>
+        <p:nvSpPr>
+          <p:cNvPr id="2" name="Text 0"/>
+          <p:cNvSpPr/>
+          <p:nvPr>
+            <p:ph idx="100" type="title" hasCustomPrompt="1"/>
+          </p:nvPr>
+        </p:nvSpPr>
+        <p:spPr>
+          <a:xfrm>
+            <a:off x="548640" y="320040"/>
+            <a:ext cx="9692640" cy="822960"/>
+          </a:xfrm>
+          <a:prstGeom prst="rect">
+            <a:avLst/>
+          </a:prstGeom>
+          <a:noFill/>
+          <a:ln/>
+        </p:spPr>
+        <p:txBody>
+          <a:bodyPr wrap="square" lIns="0" tIns="0" rIns="0" bIns="0" rtlCol="0" anchor="ctr"/>
+          <a:lstStyle/>
+          <a:p>
+            <a:pPr algn="l" indent="0" marL="0">
+              <a:buNone/>
+            </a:pPr>
+            <a:r>
+              <a:rPr lang="en-US" sz="3200" b="1" dirty="0">
+                <a:solidFill>
+                  <a:schemeClr val="tx1"/>
+                </a:solidFill>
+              </a:rPr>
+              <a:t>Restrições de integridade</a:t>
+            </a:r>
+            <a:endParaRPr lang="en-US" sz="3200" dirty="0"/>
+          </a:p>
+        </p:txBody>
+      </p:sp>
+      <p:sp>
+        <p:nvSpPr>
+          <p:cNvPr id="3" name="disco"/>
+          <p:cNvSpPr/>
+          <p:nvPr/>
+        </p:nvSpPr>
+        <p:spPr>
+          <a:xfrm>
+            <a:off x="10561320" y="411480"/>
+            <a:ext cx="640080" cy="640080"/>
+          </a:xfrm>
+          <a:prstGeom prst="ellipse">
+            <a:avLst/>
+          </a:prstGeom>
+          <a:solidFill>
+            <a:schemeClr val="tx1"/>
+          </a:solidFill>
+          <a:ln w="12700">
+            <a:solidFill>
+              <a:schemeClr val="tx1"/>
+            </a:solidFill>
+            <a:prstDash val="solid"/>
+          </a:ln>
+        </p:spPr>
+      </p:sp>
+      <p:sp>
+        <p:nvSpPr>
+          <p:cNvPr id="4" name="disco-centro"/>
+          <p:cNvSpPr/>
+          <p:nvPr/>
+        </p:nvSpPr>
+        <p:spPr>
+          <a:xfrm>
+            <a:off x="10762488" y="612648"/>
+            <a:ext cx="237744" cy="237744"/>
+          </a:xfrm>
+          <a:prstGeom prst="ellipse">
+            <a:avLst/>
+          </a:prstGeom>
+          <a:solidFill>
+            <a:schemeClr val="accent1"/>
+          </a:solidFill>
+          <a:ln w="12700">
+            <a:solidFill>
+              <a:schemeClr val="accent1"/>
+            </a:solidFill>
+            <a:prstDash val="solid"/>
+          </a:ln>
+        </p:spPr>
+      </p:sp>
+      <p:sp>
+        <p:nvSpPr>
+          <p:cNvPr id="5" name="apresentador"/>
+          <p:cNvSpPr txBox="1"/>
+          <p:nvPr/>
+        </p:nvSpPr>
+        <p:spPr>
+          <a:xfrm>
+            <a:off x="9418320" y="1097280"/>
+            <a:ext cx="2286000" cy="274320"/>
+          </a:xfrm>
+          <a:prstGeom prst="rect">
+            <a:avLst/>
+          </a:prstGeom>
+          <a:noFill/>
+          <a:ln/>
+        </p:spPr>
+        <p:txBody>
+          <a:bodyPr wrap="square" lIns="0" tIns="0" rIns="0" bIns="0" rtlCol="0" anchor="ctr"/>
+          <a:lstStyle/>
+          <a:p>
+            <a:pPr algn="r" indent="0" marL="0">
+              <a:buNone/>
+            </a:pPr>
+            <a:r>
+              <a:rPr lang="en-US" sz="1200" i="1" dirty="0">
+                <a:solidFill>
+                  <a:schemeClr val="tx2"/>
+                </a:solidFill>
+              </a:rPr>
               <a:t>Ze</a:t>
             </a:r>
             <a:endParaRPr lang="en-US" sz="1200" dirty="0"/>
@@ -6462,7 +8039,7 @@
       </p:sp>
       <p:graphicFrame>
         <p:nvGraphicFramePr>
-          <p:cNvPr id="7" name="tabela-restricoes"/>
+          <p:cNvPr id="8" name="tabela-restricoes"/>
           <p:cNvGraphicFramePr>
             <a:graphicFrameLocks noGrp="1"/>
           </p:cNvGraphicFramePr>
@@ -7631,679 +9208,6 @@
             <a:pPr algn="r"/>
             <a:fld id="{F7021451-1387-4CA6-816F-3879F97B5CBC}" type="slidenum">
               <a:rPr b="0" lang="en-US"/>
-              <a:t>6</a:t>
-            </a:fld>
-            <a:endParaRPr lang="en-US"/>
-          </a:p>
-        </p:txBody>
-      </p:sp>
-    </p:spTree>
-  </p:cSld>
-  <p:clrMapOvr>
-    <a:masterClrMapping/>
-  </p:clrMapOvr>
-</p:sld>
-</file>
-
-<file path=ppt/slides/slide7.xml><?xml version="1.0" encoding="utf-8"?>
-<p:sld xmlns:a="http://schemas.openxmlformats.org/drawingml/2006/main" xmlns:r="http://schemas.openxmlformats.org/officeDocument/2006/relationships" xmlns:p="http://schemas.openxmlformats.org/presentationml/2006/main">
-  <p:cSld name="Slide 7">
-    <p:spTree>
-      <p:nvGrpSpPr>
-        <p:cNvPr id="1" name=""/>
-        <p:cNvGrpSpPr/>
-        <p:nvPr/>
-      </p:nvGrpSpPr>
-      <p:grpSpPr>
-        <a:xfrm>
-          <a:off x="0" y="0"/>
-          <a:ext cx="0" cy="0"/>
-          <a:chOff x="0" y="0"/>
-          <a:chExt cx="0" cy="0"/>
-        </a:xfrm>
-      </p:grpSpPr>
-      <p:sp>
-        <p:nvSpPr>
-          <p:cNvPr id="2" name="Text 0"/>
-          <p:cNvSpPr/>
-          <p:nvPr>
-            <p:ph idx="100" type="title" hasCustomPrompt="1"/>
-          </p:nvPr>
-        </p:nvSpPr>
-        <p:spPr>
-          <a:xfrm>
-            <a:off x="548640" y="320040"/>
-            <a:ext cx="9692640" cy="822960"/>
-          </a:xfrm>
-          <a:prstGeom prst="rect">
-            <a:avLst/>
-          </a:prstGeom>
-          <a:noFill/>
-          <a:ln/>
-        </p:spPr>
-        <p:txBody>
-          <a:bodyPr wrap="square" lIns="0" tIns="0" rIns="0" bIns="0" rtlCol="0" anchor="ctr"/>
-          <a:lstStyle/>
-          <a:p>
-            <a:pPr algn="l" indent="0" marL="0">
-              <a:buNone/>
-            </a:pPr>
-            <a:r>
-              <a:rPr lang="en-US" sz="3200" b="1" dirty="0">
-                <a:solidFill>
-                  <a:schemeClr val="tx1"/>
-                </a:solidFill>
-              </a:rPr>
-              <a:t>Serviços externos escolhidos</a:t>
-            </a:r>
-            <a:endParaRPr lang="en-US" sz="3200" dirty="0"/>
-          </a:p>
-        </p:txBody>
-      </p:sp>
-      <p:sp>
-        <p:nvSpPr>
-          <p:cNvPr id="3" name="disco"/>
-          <p:cNvSpPr/>
-          <p:nvPr/>
-        </p:nvSpPr>
-        <p:spPr>
-          <a:xfrm>
-            <a:off x="10561320" y="411480"/>
-            <a:ext cx="640080" cy="640080"/>
-          </a:xfrm>
-          <a:prstGeom prst="ellipse">
-            <a:avLst/>
-          </a:prstGeom>
-          <a:solidFill>
-            <a:schemeClr val="tx1"/>
-          </a:solidFill>
-          <a:ln w="12700">
-            <a:solidFill>
-              <a:schemeClr val="tx1"/>
-            </a:solidFill>
-            <a:prstDash val="solid"/>
-          </a:ln>
-        </p:spPr>
-      </p:sp>
-      <p:sp>
-        <p:nvSpPr>
-          <p:cNvPr id="4" name="disco-centro"/>
-          <p:cNvSpPr/>
-          <p:nvPr/>
-        </p:nvSpPr>
-        <p:spPr>
-          <a:xfrm>
-            <a:off x="10762488" y="612648"/>
-            <a:ext cx="237744" cy="237744"/>
-          </a:xfrm>
-          <a:prstGeom prst="ellipse">
-            <a:avLst/>
-          </a:prstGeom>
-          <a:solidFill>
-            <a:schemeClr val="accent1"/>
-          </a:solidFill>
-          <a:ln w="12700">
-            <a:solidFill>
-              <a:schemeClr val="accent1"/>
-            </a:solidFill>
-            <a:prstDash val="solid"/>
-          </a:ln>
-        </p:spPr>
-      </p:sp>
-      <p:sp>
-        <p:nvSpPr>
-          <p:cNvPr id="5" name="apresentador"/>
-          <p:cNvSpPr txBox="1"/>
-          <p:nvPr/>
-        </p:nvSpPr>
-        <p:spPr>
-          <a:xfrm>
-            <a:off x="9418320" y="1097280"/>
-            <a:ext cx="2286000" cy="274320"/>
-          </a:xfrm>
-          <a:prstGeom prst="rect">
-            <a:avLst/>
-          </a:prstGeom>
-          <a:noFill/>
-          <a:ln/>
-        </p:spPr>
-        <p:txBody>
-          <a:bodyPr wrap="square" lIns="0" tIns="0" rIns="0" bIns="0" rtlCol="0" anchor="ctr"/>
-          <a:lstStyle/>
-          <a:p>
-            <a:pPr algn="r" indent="0" marL="0">
-              <a:buNone/>
-            </a:pPr>
-            <a:r>
-              <a:rPr lang="en-US" sz="1200" i="1" dirty="0">
-                <a:solidFill>
-                  <a:schemeClr val="tx2"/>
-                </a:solidFill>
-              </a:rPr>
-              <a:t>Ze</a:t>
-            </a:r>
-            <a:endParaRPr lang="en-US" sz="1200" dirty="0"/>
-          </a:p>
-        </p:txBody>
-      </p:sp>
-      <p:sp>
-        <p:nvSpPr>
-          <p:cNvPr id="6" name="cartao"/>
-          <p:cNvSpPr/>
-          <p:nvPr/>
-        </p:nvSpPr>
-        <p:spPr>
-          <a:xfrm>
-            <a:off x="548640" y="1645920"/>
-            <a:ext cx="3566160" cy="3383280"/>
-          </a:xfrm>
-          <a:prstGeom prst="roundRect">
-            <a:avLst>
-              <a:gd name="adj" fmla="val 2162"/>
-            </a:avLst>
-          </a:prstGeom>
-          <a:solidFill>
-            <a:schemeClr val="bg2"/>
-          </a:solidFill>
-          <a:ln w="12700">
-            <a:solidFill>
-              <a:srgbClr val="E4E4E7"/>
-            </a:solidFill>
-            <a:prstDash val="solid"/>
-          </a:ln>
-        </p:spPr>
-      </p:sp>
-      <p:sp>
-        <p:nvSpPr>
-          <p:cNvPr id="7" name="marca"/>
-          <p:cNvSpPr/>
-          <p:nvPr/>
-        </p:nvSpPr>
-        <p:spPr>
-          <a:xfrm>
-            <a:off x="777240" y="1901952"/>
-            <a:ext cx="201168" cy="201168"/>
-          </a:xfrm>
-          <a:prstGeom prst="ellipse">
-            <a:avLst/>
-          </a:prstGeom>
-          <a:solidFill>
-            <a:schemeClr val="accent3"/>
-          </a:solidFill>
-          <a:ln w="12700">
-            <a:solidFill>
-              <a:schemeClr val="accent3"/>
-            </a:solidFill>
-            <a:prstDash val="solid"/>
-          </a:ln>
-        </p:spPr>
-      </p:sp>
-      <p:sp>
-        <p:nvSpPr>
-          <p:cNvPr id="8" name="Text 6"/>
-          <p:cNvSpPr txBox="1"/>
-          <p:nvPr/>
-        </p:nvSpPr>
-        <p:spPr>
-          <a:xfrm>
-            <a:off x="1097280" y="1810512"/>
-            <a:ext cx="2834640" cy="384048"/>
-          </a:xfrm>
-          <a:prstGeom prst="rect">
-            <a:avLst/>
-          </a:prstGeom>
-          <a:noFill/>
-          <a:ln/>
-        </p:spPr>
-        <p:txBody>
-          <a:bodyPr wrap="square" lIns="0" tIns="0" rIns="0" bIns="0" rtlCol="0" anchor="ctr"/>
-          <a:lstStyle/>
-          <a:p>
-            <a:pPr indent="0" marL="0">
-              <a:buNone/>
-            </a:pPr>
-            <a:r>
-              <a:rPr lang="en-US" sz="1600" b="1" dirty="0">
-                <a:solidFill>
-                  <a:schemeClr val="tx1"/>
-                </a:solidFill>
-              </a:rPr>
-              <a:t>Mapas: Leaflet + OSM</a:t>
-            </a:r>
-            <a:endParaRPr lang="en-US" sz="1600" dirty="0"/>
-          </a:p>
-        </p:txBody>
-      </p:sp>
-      <p:sp>
-        <p:nvSpPr>
-          <p:cNvPr id="9" name="Text 7"/>
-          <p:cNvSpPr txBox="1"/>
-          <p:nvPr/>
-        </p:nvSpPr>
-        <p:spPr>
-          <a:xfrm>
-            <a:off x="1097280" y="2212848"/>
-            <a:ext cx="2834640" cy="2697480"/>
-          </a:xfrm>
-          <a:prstGeom prst="rect">
-            <a:avLst/>
-          </a:prstGeom>
-          <a:noFill/>
-          <a:ln/>
-        </p:spPr>
-        <p:txBody>
-          <a:bodyPr wrap="square" lIns="0" tIns="0" rIns="0" bIns="0" rtlCol="0" anchor="t"/>
-          <a:lstStyle/>
-          <a:p>
-            <a:pPr indent="0" marL="0">
-              <a:buNone/>
-            </a:pPr>
-            <a:r>
-              <a:rPr lang="en-US" sz="1600" dirty="0">
-                <a:solidFill>
-                  <a:schemeClr val="tx2"/>
-                </a:solidFill>
-              </a:rPr>
-              <a:t>Gratuito, sem cartão de crédito e de código aberto (RNF-05).</a:t>
-            </a:r>
-            <a:endParaRPr lang="en-US" sz="1600" dirty="0"/>
-          </a:p>
-          <a:p>
-            <a:pPr indent="0" marL="0">
-              <a:buNone/>
-            </a:pPr>
-            <a:endParaRPr lang="en-US" sz="1600" dirty="0"/>
-          </a:p>
-          <a:p>
-            <a:pPr indent="0" marL="0">
-              <a:buNone/>
-            </a:pPr>
-            <a:r>
-              <a:rPr lang="en-US" sz="1600" dirty="0">
-                <a:solidFill>
-                  <a:schemeClr val="tx2"/>
-                </a:solidFill>
-              </a:rPr>
-              <a:t>Comparado com Google Maps (10 000 carregamentos grátis/mês) e Mapbox.</a:t>
-            </a:r>
-            <a:endParaRPr lang="en-US" sz="1600" dirty="0"/>
-          </a:p>
-        </p:txBody>
-      </p:sp>
-      <p:sp>
-        <p:nvSpPr>
-          <p:cNvPr id="10" name="cartao"/>
-          <p:cNvSpPr/>
-          <p:nvPr/>
-        </p:nvSpPr>
-        <p:spPr>
-          <a:xfrm>
-            <a:off x="4315968" y="1645920"/>
-            <a:ext cx="3566160" cy="3383280"/>
-          </a:xfrm>
-          <a:prstGeom prst="roundRect">
-            <a:avLst>
-              <a:gd name="adj" fmla="val 2162"/>
-            </a:avLst>
-          </a:prstGeom>
-          <a:solidFill>
-            <a:schemeClr val="bg2"/>
-          </a:solidFill>
-          <a:ln w="12700">
-            <a:solidFill>
-              <a:srgbClr val="E4E4E7"/>
-            </a:solidFill>
-            <a:prstDash val="solid"/>
-          </a:ln>
-        </p:spPr>
-      </p:sp>
-      <p:sp>
-        <p:nvSpPr>
-          <p:cNvPr id="11" name="marca"/>
-          <p:cNvSpPr/>
-          <p:nvPr/>
-        </p:nvSpPr>
-        <p:spPr>
-          <a:xfrm>
-            <a:off x="4544568" y="1901952"/>
-            <a:ext cx="201168" cy="201168"/>
-          </a:xfrm>
-          <a:prstGeom prst="ellipse">
-            <a:avLst/>
-          </a:prstGeom>
-          <a:solidFill>
-            <a:schemeClr val="accent3"/>
-          </a:solidFill>
-          <a:ln w="12700">
-            <a:solidFill>
-              <a:schemeClr val="accent3"/>
-            </a:solidFill>
-            <a:prstDash val="solid"/>
-          </a:ln>
-        </p:spPr>
-      </p:sp>
-      <p:sp>
-        <p:nvSpPr>
-          <p:cNvPr id="12" name="Text 10"/>
-          <p:cNvSpPr txBox="1"/>
-          <p:nvPr/>
-        </p:nvSpPr>
-        <p:spPr>
-          <a:xfrm>
-            <a:off x="4864608" y="1810512"/>
-            <a:ext cx="2834640" cy="384048"/>
-          </a:xfrm>
-          <a:prstGeom prst="rect">
-            <a:avLst/>
-          </a:prstGeom>
-          <a:noFill/>
-          <a:ln/>
-        </p:spPr>
-        <p:txBody>
-          <a:bodyPr wrap="square" lIns="0" tIns="0" rIns="0" bIns="0" rtlCol="0" anchor="ctr"/>
-          <a:lstStyle/>
-          <a:p>
-            <a:pPr indent="0" marL="0">
-              <a:buNone/>
-            </a:pPr>
-            <a:r>
-              <a:rPr lang="en-US" sz="1600" b="1" dirty="0">
-                <a:solidFill>
-                  <a:schemeClr val="tx1"/>
-                </a:solidFill>
-              </a:rPr>
-              <a:t>Geocodificação: Nominatim</a:t>
-            </a:r>
-            <a:endParaRPr lang="en-US" sz="1600" dirty="0"/>
-          </a:p>
-        </p:txBody>
-      </p:sp>
-      <p:sp>
-        <p:nvSpPr>
-          <p:cNvPr id="13" name="Text 11"/>
-          <p:cNvSpPr txBox="1"/>
-          <p:nvPr/>
-        </p:nvSpPr>
-        <p:spPr>
-          <a:xfrm>
-            <a:off x="4864608" y="2212848"/>
-            <a:ext cx="2834640" cy="2697480"/>
-          </a:xfrm>
-          <a:prstGeom prst="rect">
-            <a:avLst/>
-          </a:prstGeom>
-          <a:noFill/>
-          <a:ln/>
-        </p:spPr>
-        <p:txBody>
-          <a:bodyPr wrap="square" lIns="0" tIns="0" rIns="0" bIns="0" rtlCol="0" anchor="t"/>
-          <a:lstStyle/>
-          <a:p>
-            <a:pPr indent="0" marL="0">
-              <a:buNone/>
-            </a:pPr>
-            <a:r>
-              <a:rPr lang="en-US" sz="1600" dirty="0">
-                <a:solidFill>
-                  <a:schemeClr val="tx2"/>
-                </a:solidFill>
-              </a:rPr>
-              <a:t>O único que deixa guardar as coordenadas na base de dados de graça.</a:t>
-            </a:r>
-            <a:endParaRPr lang="en-US" sz="1600" dirty="0"/>
-          </a:p>
-          <a:p>
-            <a:pPr indent="0" marL="0">
-              <a:buNone/>
-            </a:pPr>
-            <a:endParaRPr lang="en-US" sz="1600" dirty="0"/>
-          </a:p>
-          <a:p>
-            <a:pPr indent="0" marL="0">
-              <a:buNone/>
-            </a:pPr>
-            <a:r>
-              <a:rPr lang="en-US" sz="1600" dirty="0">
-                <a:solidFill>
-                  <a:schemeClr val="tx2"/>
-                </a:solidFill>
-              </a:rPr>
-              <a:t>Cuidados: 1 pedido por morada, sem auto-complete, sem enviar o nome.</a:t>
-            </a:r>
-            <a:endParaRPr lang="en-US" sz="1600" dirty="0"/>
-          </a:p>
-        </p:txBody>
-      </p:sp>
-      <p:sp>
-        <p:nvSpPr>
-          <p:cNvPr id="14" name="cartao"/>
-          <p:cNvSpPr/>
-          <p:nvPr/>
-        </p:nvSpPr>
-        <p:spPr>
-          <a:xfrm>
-            <a:off x="8083296" y="1645920"/>
-            <a:ext cx="3566160" cy="3383280"/>
-          </a:xfrm>
-          <a:prstGeom prst="roundRect">
-            <a:avLst>
-              <a:gd name="adj" fmla="val 2162"/>
-            </a:avLst>
-          </a:prstGeom>
-          <a:solidFill>
-            <a:schemeClr val="bg2"/>
-          </a:solidFill>
-          <a:ln w="12700">
-            <a:solidFill>
-              <a:srgbClr val="E4E4E7"/>
-            </a:solidFill>
-            <a:prstDash val="solid"/>
-          </a:ln>
-        </p:spPr>
-      </p:sp>
-      <p:sp>
-        <p:nvSpPr>
-          <p:cNvPr id="15" name="marca"/>
-          <p:cNvSpPr/>
-          <p:nvPr/>
-        </p:nvSpPr>
-        <p:spPr>
-          <a:xfrm>
-            <a:off x="8311896" y="1901952"/>
-            <a:ext cx="201168" cy="201168"/>
-          </a:xfrm>
-          <a:prstGeom prst="ellipse">
-            <a:avLst/>
-          </a:prstGeom>
-          <a:solidFill>
-            <a:schemeClr val="accent1"/>
-          </a:solidFill>
-          <a:ln w="12700">
-            <a:solidFill>
-              <a:schemeClr val="accent1"/>
-            </a:solidFill>
-            <a:prstDash val="solid"/>
-          </a:ln>
-        </p:spPr>
-      </p:sp>
-      <p:sp>
-        <p:nvSpPr>
-          <p:cNvPr id="16" name="Text 14"/>
-          <p:cNvSpPr txBox="1"/>
-          <p:nvPr/>
-        </p:nvSpPr>
-        <p:spPr>
-          <a:xfrm>
-            <a:off x="8631936" y="1810512"/>
-            <a:ext cx="2834640" cy="384048"/>
-          </a:xfrm>
-          <a:prstGeom prst="rect">
-            <a:avLst/>
-          </a:prstGeom>
-          <a:noFill/>
-          <a:ln/>
-        </p:spPr>
-        <p:txBody>
-          <a:bodyPr wrap="square" lIns="0" tIns="0" rIns="0" bIns="0" rtlCol="0" anchor="ctr"/>
-          <a:lstStyle/>
-          <a:p>
-            <a:pPr indent="0" marL="0">
-              <a:buNone/>
-            </a:pPr>
-            <a:r>
-              <a:rPr lang="en-US" sz="1600" b="1" dirty="0">
-                <a:solidFill>
-                  <a:schemeClr val="tx1"/>
-                </a:solidFill>
-              </a:rPr>
-              <a:t>Pagamentos: Stripe + PayPal</a:t>
-            </a:r>
-            <a:endParaRPr lang="en-US" sz="1600" dirty="0"/>
-          </a:p>
-        </p:txBody>
-      </p:sp>
-      <p:sp>
-        <p:nvSpPr>
-          <p:cNvPr id="17" name="Text 15"/>
-          <p:cNvSpPr txBox="1"/>
-          <p:nvPr/>
-        </p:nvSpPr>
-        <p:spPr>
-          <a:xfrm>
-            <a:off x="8631936" y="2212848"/>
-            <a:ext cx="2834640" cy="2697480"/>
-          </a:xfrm>
-          <a:prstGeom prst="rect">
-            <a:avLst/>
-          </a:prstGeom>
-          <a:noFill/>
-          <a:ln/>
-        </p:spPr>
-        <p:txBody>
-          <a:bodyPr wrap="square" lIns="0" tIns="0" rIns="0" bIns="0" rtlCol="0" anchor="t"/>
-          <a:lstStyle/>
-          <a:p>
-            <a:pPr indent="0" marL="0">
-              <a:buNone/>
-            </a:pPr>
-            <a:r>
-              <a:rPr lang="en-US" sz="1600" dirty="0">
-                <a:solidFill>
-                  <a:schemeClr val="tx2"/>
-                </a:solidFill>
-              </a:rPr>
-              <a:t>A US28 obriga a deixar o utilizador escolher o serviço.</a:t>
-            </a:r>
-            <a:endParaRPr lang="en-US" sz="1600" dirty="0"/>
-          </a:p>
-          <a:p>
-            <a:pPr indent="0" marL="0">
-              <a:buNone/>
-            </a:pPr>
-            <a:endParaRPr lang="en-US" sz="1600" dirty="0"/>
-          </a:p>
-          <a:p>
-            <a:pPr indent="0" marL="0">
-              <a:buNone/>
-            </a:pPr>
-            <a:r>
-              <a:rPr lang="en-US" sz="1600" dirty="0">
-                <a:solidFill>
-                  <a:schemeClr val="tx2"/>
-                </a:solidFill>
-              </a:rPr>
-              <a:t>Stripe: 1,5% + 0,25 € e MB WAY. PayPal: para quem paga com a conta. Ambos com modo de testes.</a:t>
-            </a:r>
-            <a:endParaRPr lang="en-US" sz="1600" dirty="0"/>
-          </a:p>
-        </p:txBody>
-      </p:sp>
-      <p:sp>
-        <p:nvSpPr>
-          <p:cNvPr id="18" name="outros-servicos"/>
-          <p:cNvSpPr txBox="1"/>
-          <p:nvPr/>
-        </p:nvSpPr>
-        <p:spPr>
-          <a:xfrm>
-            <a:off x="548640" y="5303520"/>
-            <a:ext cx="11064240" cy="548640"/>
-          </a:xfrm>
-          <a:prstGeom prst="rect">
-            <a:avLst/>
-          </a:prstGeom>
-          <a:noFill/>
-          <a:ln/>
-        </p:spPr>
-        <p:txBody>
-          <a:bodyPr wrap="square" lIns="0" tIns="0" rIns="0" bIns="0" rtlCol="0" anchor="ctr"/>
-          <a:lstStyle/>
-          <a:p>
-            <a:pPr indent="0" marL="0">
-              <a:buNone/>
-            </a:pPr>
-            <a:r>
-              <a:rPr lang="en-US" sz="1500" b="1" dirty="0">
-                <a:solidFill>
-                  <a:schemeClr val="tx1"/>
-                </a:solidFill>
-              </a:rPr>
-              <a:t>Também pesquisados: </a:t>
-            </a:r>
-            <a:pPr indent="0" marL="0">
-              <a:buNone/>
-            </a:pPr>
-            <a:r>
-              <a:rPr lang="en-US" sz="1500" dirty="0">
-                <a:solidFill>
-                  <a:schemeClr val="tx1"/>
-                </a:solidFill>
-              </a:rPr>
-              <a:t>imagens de capa no Cloudinary, com sugestão do Cover Art Archive pelo MBID; faixas e canções importadas da API do MusicBrainz (dados CC0).</a:t>
-            </a:r>
-            <a:endParaRPr lang="en-US" sz="1500" dirty="0"/>
-          </a:p>
-        </p:txBody>
-      </p:sp>
-      <p:sp>
-        <p:nvSpPr>
-          <p:cNvPr id="25" name="Slide Number Placeholder 0"/>
-          <p:cNvSpPr>
-            <a:spLocks noGrp="1"/>
-          </p:cNvSpPr>
-          <p:nvPr>
-            <p:ph type="sldNum" sz="quarter" idx="4294967295"/>
-          </p:nvPr>
-        </p:nvSpPr>
-        <p:spPr>
-          <a:xfrm>
-            <a:off x="11247120" y="6446520"/>
-            <a:ext cx="457200" cy="274320"/>
-          </a:xfrm>
-          <a:prstGeom prst="rect">
-            <a:avLst/>
-          </a:prstGeom>
-          <a:extLst>
-            <a:ext uri="{C572A759-6A51-4108-AA02-DFA0A04FC94B}">
-              <ma14:wrappingTextBoxFlag xmlns:ma14="http://schemas.microsoft.com/office/mac/drawingml/2011/main" val="0"/>
-            </a:ext>
-          </a:extLst>
-        </p:spPr>
-        <p:txBody>
-          <a:bodyPr/>
-          <a:lstStyle>
-            <a:lvl1pPr>
-              <a:defRPr sz="1000">
-                <a:solidFill>
-                  <a:srgbClr val="71717A"/>
-                </a:solidFill>
-              </a:defRPr>
-            </a:lvl1pPr>
-          </a:lstStyle>
-          <a:p>
-            <a:pPr algn="r"/>
-            <a:fld id="{F7021451-1387-4CA6-816F-3879F97B5CBC}" type="slidenum">
-              <a:rPr b="0" lang="en-US"/>
               <a:t>7</a:t>
             </a:fld>
             <a:endParaRPr lang="en-US"/>
@@ -8367,7 +9271,7 @@
                   <a:schemeClr val="tx1"/>
                 </a:solidFill>
               </a:rPr>
-              <a:t>Fluxo de compra: o pagamento</a:t>
+              <a:t>Serviços externos escolhidos</a:t>
             </a:r>
             <a:endParaRPr lang="en-US" sz="3200" dirty="0"/>
           </a:p>
@@ -8453,53 +9357,337 @@
                   <a:schemeClr val="tx2"/>
                 </a:solidFill>
               </a:rPr>
-              <a:t>Edson</a:t>
+              <a:t>Ze</a:t>
             </a:r>
             <a:endParaRPr lang="en-US" sz="1200" dirty="0"/>
           </a:p>
         </p:txBody>
       </p:sp>
-      <p:pic>
-        <p:nvPicPr>
-          <p:cNvPr id="6" name="diagrama-pagar" descr="C:\Users\rodri\Desktop\PGP\etapa1\atividades\img\01-1-pagar.png">    </p:cNvPr>
-          <p:cNvPicPr>
-            <a:picLocks noChangeAspect="1"/>
-          </p:cNvPicPr>
-          <p:nvPr/>
-        </p:nvPicPr>
-        <p:blipFill>
-          <a:blip r:embed="rId1"/>
-          <a:stretch>
-            <a:fillRect/>
-          </a:stretch>
-        </p:blipFill>
-        <p:spPr>
-          <a:xfrm>
-            <a:off x="573534" y="1280160"/>
-            <a:ext cx="3242052" cy="5074920"/>
-          </a:xfrm>
-          <a:prstGeom prst="rect">
-            <a:avLst/>
-          </a:prstGeom>
-          <a:effectLst>
-            <a:outerShdw sx="100000" sy="100000" kx="0" ky="0" algn="bl" rotWithShape="0" blurRad="76200" dist="25400" dir="5400000">
-              <a:srgbClr val="000000">
-                <a:alpha val="18000"/>
-              </a:srgbClr>
-            </a:outerShdw>
-          </a:effectLst>
-        </p:spPr>
-      </p:pic>
-      <p:sp>
-        <p:nvSpPr>
-          <p:cNvPr id="7" name="passo"/>
+      <p:sp>
+        <p:nvSpPr>
+          <p:cNvPr id="6" name="cartao"/>
           <p:cNvSpPr/>
           <p:nvPr/>
         </p:nvSpPr>
         <p:spPr>
           <a:xfrm>
-            <a:off x="4389120" y="1645920"/>
-            <a:ext cx="457200" cy="457200"/>
+            <a:off x="548640" y="1645920"/>
+            <a:ext cx="3566160" cy="3383280"/>
+          </a:xfrm>
+          <a:prstGeom prst="roundRect">
+            <a:avLst>
+              <a:gd name="adj" fmla="val 2162"/>
+            </a:avLst>
+          </a:prstGeom>
+          <a:solidFill>
+            <a:schemeClr val="bg2"/>
+          </a:solidFill>
+          <a:ln w="12700">
+            <a:solidFill>
+              <a:srgbClr val="E4E4E7"/>
+            </a:solidFill>
+            <a:prstDash val="solid"/>
+          </a:ln>
+        </p:spPr>
+      </p:sp>
+      <p:sp>
+        <p:nvSpPr>
+          <p:cNvPr id="7" name="marca"/>
+          <p:cNvSpPr/>
+          <p:nvPr/>
+        </p:nvSpPr>
+        <p:spPr>
+          <a:xfrm>
+            <a:off x="777240" y="1901952"/>
+            <a:ext cx="201168" cy="201168"/>
+          </a:xfrm>
+          <a:prstGeom prst="ellipse">
+            <a:avLst/>
+          </a:prstGeom>
+          <a:solidFill>
+            <a:schemeClr val="accent3"/>
+          </a:solidFill>
+          <a:ln w="12700">
+            <a:solidFill>
+              <a:schemeClr val="accent3"/>
+            </a:solidFill>
+            <a:prstDash val="solid"/>
+          </a:ln>
+        </p:spPr>
+      </p:sp>
+      <p:sp>
+        <p:nvSpPr>
+          <p:cNvPr id="8" name="Text 6"/>
+          <p:cNvSpPr txBox="1"/>
+          <p:nvPr/>
+        </p:nvSpPr>
+        <p:spPr>
+          <a:xfrm>
+            <a:off x="1097280" y="1810512"/>
+            <a:ext cx="2834640" cy="384048"/>
+          </a:xfrm>
+          <a:prstGeom prst="rect">
+            <a:avLst/>
+          </a:prstGeom>
+          <a:noFill/>
+          <a:ln/>
+        </p:spPr>
+        <p:txBody>
+          <a:bodyPr wrap="square" lIns="0" tIns="0" rIns="0" bIns="0" rtlCol="0" anchor="ctr"/>
+          <a:lstStyle/>
+          <a:p>
+            <a:pPr indent="0" marL="0">
+              <a:buNone/>
+            </a:pPr>
+            <a:r>
+              <a:rPr lang="en-US" sz="1600" b="1" dirty="0">
+                <a:solidFill>
+                  <a:schemeClr val="tx1"/>
+                </a:solidFill>
+              </a:rPr>
+              <a:t>Mapas: Leaflet + OSM</a:t>
+            </a:r>
+            <a:endParaRPr lang="en-US" sz="1600" dirty="0"/>
+          </a:p>
+        </p:txBody>
+      </p:sp>
+      <p:sp>
+        <p:nvSpPr>
+          <p:cNvPr id="9" name="Text 7"/>
+          <p:cNvSpPr txBox="1"/>
+          <p:nvPr/>
+        </p:nvSpPr>
+        <p:spPr>
+          <a:xfrm>
+            <a:off x="1097280" y="2212848"/>
+            <a:ext cx="2834640" cy="2697480"/>
+          </a:xfrm>
+          <a:prstGeom prst="rect">
+            <a:avLst/>
+          </a:prstGeom>
+          <a:noFill/>
+          <a:ln/>
+        </p:spPr>
+        <p:txBody>
+          <a:bodyPr wrap="square" lIns="0" tIns="0" rIns="0" bIns="0" rtlCol="0" anchor="t"/>
+          <a:lstStyle/>
+          <a:p>
+            <a:pPr indent="0" marL="0">
+              <a:buNone/>
+            </a:pPr>
+            <a:r>
+              <a:rPr lang="en-US" sz="1600" dirty="0">
+                <a:solidFill>
+                  <a:schemeClr val="tx2"/>
+                </a:solidFill>
+              </a:rPr>
+              <a:t>Gratuito, sem cartão de crédito e de código aberto (RNF-05).</a:t>
+            </a:r>
+            <a:endParaRPr lang="en-US" sz="1600" dirty="0"/>
+          </a:p>
+          <a:p>
+            <a:pPr indent="0" marL="0">
+              <a:buNone/>
+            </a:pPr>
+            <a:endParaRPr lang="en-US" sz="1600" dirty="0"/>
+          </a:p>
+          <a:p>
+            <a:pPr indent="0" marL="0">
+              <a:buNone/>
+            </a:pPr>
+            <a:r>
+              <a:rPr lang="en-US" sz="1600" dirty="0">
+                <a:solidFill>
+                  <a:schemeClr val="tx2"/>
+                </a:solidFill>
+              </a:rPr>
+              <a:t>Comparado com Google Maps (10 000 carregamentos grátis/mês) e Mapbox.</a:t>
+            </a:r>
+            <a:endParaRPr lang="en-US" sz="1600" dirty="0"/>
+          </a:p>
+        </p:txBody>
+      </p:sp>
+      <p:sp>
+        <p:nvSpPr>
+          <p:cNvPr id="10" name="cartao"/>
+          <p:cNvSpPr/>
+          <p:nvPr/>
+        </p:nvSpPr>
+        <p:spPr>
+          <a:xfrm>
+            <a:off x="4315968" y="1645920"/>
+            <a:ext cx="3566160" cy="3383280"/>
+          </a:xfrm>
+          <a:prstGeom prst="roundRect">
+            <a:avLst>
+              <a:gd name="adj" fmla="val 2162"/>
+            </a:avLst>
+          </a:prstGeom>
+          <a:solidFill>
+            <a:schemeClr val="bg2"/>
+          </a:solidFill>
+          <a:ln w="12700">
+            <a:solidFill>
+              <a:srgbClr val="E4E4E7"/>
+            </a:solidFill>
+            <a:prstDash val="solid"/>
+          </a:ln>
+        </p:spPr>
+      </p:sp>
+      <p:sp>
+        <p:nvSpPr>
+          <p:cNvPr id="11" name="marca"/>
+          <p:cNvSpPr/>
+          <p:nvPr/>
+        </p:nvSpPr>
+        <p:spPr>
+          <a:xfrm>
+            <a:off x="4544568" y="1901952"/>
+            <a:ext cx="201168" cy="201168"/>
+          </a:xfrm>
+          <a:prstGeom prst="ellipse">
+            <a:avLst/>
+          </a:prstGeom>
+          <a:solidFill>
+            <a:schemeClr val="accent3"/>
+          </a:solidFill>
+          <a:ln w="12700">
+            <a:solidFill>
+              <a:schemeClr val="accent3"/>
+            </a:solidFill>
+            <a:prstDash val="solid"/>
+          </a:ln>
+        </p:spPr>
+      </p:sp>
+      <p:sp>
+        <p:nvSpPr>
+          <p:cNvPr id="12" name="Text 10"/>
+          <p:cNvSpPr txBox="1"/>
+          <p:nvPr/>
+        </p:nvSpPr>
+        <p:spPr>
+          <a:xfrm>
+            <a:off x="4864608" y="1810512"/>
+            <a:ext cx="2834640" cy="384048"/>
+          </a:xfrm>
+          <a:prstGeom prst="rect">
+            <a:avLst/>
+          </a:prstGeom>
+          <a:noFill/>
+          <a:ln/>
+        </p:spPr>
+        <p:txBody>
+          <a:bodyPr wrap="square" lIns="0" tIns="0" rIns="0" bIns="0" rtlCol="0" anchor="ctr"/>
+          <a:lstStyle/>
+          <a:p>
+            <a:pPr indent="0" marL="0">
+              <a:buNone/>
+            </a:pPr>
+            <a:r>
+              <a:rPr lang="en-US" sz="1600" b="1" dirty="0">
+                <a:solidFill>
+                  <a:schemeClr val="tx1"/>
+                </a:solidFill>
+              </a:rPr>
+              <a:t>Geocodificação: Nominatim</a:t>
+            </a:r>
+            <a:endParaRPr lang="en-US" sz="1600" dirty="0"/>
+          </a:p>
+        </p:txBody>
+      </p:sp>
+      <p:sp>
+        <p:nvSpPr>
+          <p:cNvPr id="13" name="Text 11"/>
+          <p:cNvSpPr txBox="1"/>
+          <p:nvPr/>
+        </p:nvSpPr>
+        <p:spPr>
+          <a:xfrm>
+            <a:off x="4864608" y="2212848"/>
+            <a:ext cx="2834640" cy="2697480"/>
+          </a:xfrm>
+          <a:prstGeom prst="rect">
+            <a:avLst/>
+          </a:prstGeom>
+          <a:noFill/>
+          <a:ln/>
+        </p:spPr>
+        <p:txBody>
+          <a:bodyPr wrap="square" lIns="0" tIns="0" rIns="0" bIns="0" rtlCol="0" anchor="t"/>
+          <a:lstStyle/>
+          <a:p>
+            <a:pPr indent="0" marL="0">
+              <a:buNone/>
+            </a:pPr>
+            <a:r>
+              <a:rPr lang="en-US" sz="1600" dirty="0">
+                <a:solidFill>
+                  <a:schemeClr val="tx2"/>
+                </a:solidFill>
+              </a:rPr>
+              <a:t>O único que deixa guardar as coordenadas na base de dados de graça.</a:t>
+            </a:r>
+            <a:endParaRPr lang="en-US" sz="1600" dirty="0"/>
+          </a:p>
+          <a:p>
+            <a:pPr indent="0" marL="0">
+              <a:buNone/>
+            </a:pPr>
+            <a:endParaRPr lang="en-US" sz="1600" dirty="0"/>
+          </a:p>
+          <a:p>
+            <a:pPr indent="0" marL="0">
+              <a:buNone/>
+            </a:pPr>
+            <a:r>
+              <a:rPr lang="en-US" sz="1600" dirty="0">
+                <a:solidFill>
+                  <a:schemeClr val="tx2"/>
+                </a:solidFill>
+              </a:rPr>
+              <a:t>Cuidados: 1 pedido por morada, sem auto-complete, sem enviar o nome.</a:t>
+            </a:r>
+            <a:endParaRPr lang="en-US" sz="1600" dirty="0"/>
+          </a:p>
+        </p:txBody>
+      </p:sp>
+      <p:sp>
+        <p:nvSpPr>
+          <p:cNvPr id="14" name="cartao"/>
+          <p:cNvSpPr/>
+          <p:nvPr/>
+        </p:nvSpPr>
+        <p:spPr>
+          <a:xfrm>
+            <a:off x="8083296" y="1645920"/>
+            <a:ext cx="3566160" cy="3383280"/>
+          </a:xfrm>
+          <a:prstGeom prst="roundRect">
+            <a:avLst>
+              <a:gd name="adj" fmla="val 2162"/>
+            </a:avLst>
+          </a:prstGeom>
+          <a:solidFill>
+            <a:schemeClr val="bg2"/>
+          </a:solidFill>
+          <a:ln w="12700">
+            <a:solidFill>
+              <a:srgbClr val="E4E4E7"/>
+            </a:solidFill>
+            <a:prstDash val="solid"/>
+          </a:ln>
+        </p:spPr>
+      </p:sp>
+      <p:sp>
+        <p:nvSpPr>
+          <p:cNvPr id="15" name="marca"/>
+          <p:cNvSpPr/>
+          <p:nvPr/>
+        </p:nvSpPr>
+        <p:spPr>
+          <a:xfrm>
+            <a:off x="8311896" y="1901952"/>
+            <a:ext cx="201168" cy="201168"/>
           </a:xfrm>
           <a:prstGeom prst="ellipse">
             <a:avLst/>
@@ -8517,14 +9705,14 @@
       </p:sp>
       <p:sp>
         <p:nvSpPr>
-          <p:cNvPr id="8" name="Text 5"/>
+          <p:cNvPr id="16" name="Text 14"/>
           <p:cNvSpPr txBox="1"/>
           <p:nvPr/>
         </p:nvSpPr>
         <p:spPr>
           <a:xfrm>
-            <a:off x="4389120" y="1645920"/>
-            <a:ext cx="457200" cy="457200"/>
+            <a:off x="8631936" y="1810512"/>
+            <a:ext cx="2834640" cy="384048"/>
           </a:xfrm>
           <a:prstGeom prst="rect">
             <a:avLst/>
@@ -8536,16 +9724,16 @@
           <a:bodyPr wrap="square" lIns="0" tIns="0" rIns="0" bIns="0" rtlCol="0" anchor="ctr"/>
           <a:lstStyle/>
           <a:p>
-            <a:pPr algn="ctr" indent="0" marL="0">
+            <a:pPr indent="0" marL="0">
               <a:buNone/>
             </a:pPr>
             <a:r>
               <a:rPr lang="en-US" sz="1600" b="1" dirty="0">
                 <a:solidFill>
-                  <a:schemeClr val="bg1"/>
-                </a:solidFill>
-              </a:rPr>
-              <a:t>1</a:t>
+                  <a:schemeClr val="tx1"/>
+                </a:solidFill>
+              </a:rPr>
+              <a:t>Pagamentos: Stripe + PayPal</a:t>
             </a:r>
             <a:endParaRPr lang="en-US" sz="1600" dirty="0"/>
           </a:p>
@@ -8553,14 +9741,14 @@
       </p:sp>
       <p:sp>
         <p:nvSpPr>
-          <p:cNvPr id="9" name="Text 6"/>
+          <p:cNvPr id="17" name="Text 15"/>
           <p:cNvSpPr txBox="1"/>
           <p:nvPr/>
         </p:nvSpPr>
         <p:spPr>
           <a:xfrm>
-            <a:off x="5029200" y="1600200"/>
-            <a:ext cx="6583680" cy="548640"/>
+            <a:off x="8631936" y="2212848"/>
+            <a:ext cx="2834640" cy="2697480"/>
           </a:xfrm>
           <a:prstGeom prst="rect">
             <a:avLst/>
@@ -8569,59 +9757,54 @@
           <a:ln/>
         </p:spPr>
         <p:txBody>
-          <a:bodyPr wrap="square" lIns="0" tIns="0" rIns="0" bIns="0" rtlCol="0" anchor="ctr"/>
+          <a:bodyPr wrap="square" lIns="0" tIns="0" rIns="0" bIns="0" rtlCol="0" anchor="t"/>
           <a:lstStyle/>
           <a:p>
             <a:pPr indent="0" marL="0">
               <a:buNone/>
             </a:pPr>
             <a:r>
-              <a:rPr lang="en-US" sz="1500" dirty="0">
-                <a:solidFill>
-                  <a:schemeClr val="tx1"/>
-                </a:solidFill>
-              </a:rPr>
-              <a:t>Reserva as unidades; se uma versão esgotou entretanto, sai do carrinho</a:t>
-            </a:r>
-            <a:endParaRPr lang="en-US" sz="1500" dirty="0"/>
-          </a:p>
-        </p:txBody>
-      </p:sp>
-      <p:sp>
-        <p:nvSpPr>
-          <p:cNvPr id="10" name="passo"/>
-          <p:cNvSpPr/>
-          <p:nvPr/>
-        </p:nvSpPr>
-        <p:spPr>
-          <a:xfrm>
-            <a:off x="4389120" y="2514600"/>
-            <a:ext cx="457200" cy="457200"/>
-          </a:xfrm>
-          <a:prstGeom prst="ellipse">
-            <a:avLst/>
-          </a:prstGeom>
-          <a:solidFill>
-            <a:schemeClr val="accent1"/>
-          </a:solidFill>
-          <a:ln w="12700">
-            <a:solidFill>
-              <a:schemeClr val="accent1"/>
-            </a:solidFill>
-            <a:prstDash val="solid"/>
-          </a:ln>
-        </p:spPr>
-      </p:sp>
-      <p:sp>
-        <p:nvSpPr>
-          <p:cNvPr id="11" name="Text 8"/>
+              <a:rPr lang="en-US" sz="1600" dirty="0">
+                <a:solidFill>
+                  <a:schemeClr val="tx2"/>
+                </a:solidFill>
+              </a:rPr>
+              <a:t>A US28 obriga a deixar o utilizador escolher o serviço.</a:t>
+            </a:r>
+            <a:endParaRPr lang="en-US" sz="1600" dirty="0"/>
+          </a:p>
+          <a:p>
+            <a:pPr indent="0" marL="0">
+              <a:buNone/>
+            </a:pPr>
+            <a:endParaRPr lang="en-US" sz="1600" dirty="0"/>
+          </a:p>
+          <a:p>
+            <a:pPr indent="0" marL="0">
+              <a:buNone/>
+            </a:pPr>
+            <a:r>
+              <a:rPr lang="en-US" sz="1600" dirty="0">
+                <a:solidFill>
+                  <a:schemeClr val="tx2"/>
+                </a:solidFill>
+              </a:rPr>
+              <a:t>Stripe: 1,5% + 0,25 € e MB WAY. PayPal: para quem paga com a conta. Ambos com modo de testes.</a:t>
+            </a:r>
+            <a:endParaRPr lang="en-US" sz="1600" dirty="0"/>
+          </a:p>
+        </p:txBody>
+      </p:sp>
+      <p:sp>
+        <p:nvSpPr>
+          <p:cNvPr id="18" name="outros-servicos"/>
           <p:cNvSpPr txBox="1"/>
           <p:nvPr/>
         </p:nvSpPr>
         <p:spPr>
           <a:xfrm>
-            <a:off x="4389120" y="2514600"/>
-            <a:ext cx="457200" cy="457200"/>
+            <a:off x="548640" y="5303520"/>
+            <a:ext cx="11064240" cy="548640"/>
           </a:xfrm>
           <a:prstGeom prst="rect">
             <a:avLst/>
@@ -8633,139 +9816,17 @@
           <a:bodyPr wrap="square" lIns="0" tIns="0" rIns="0" bIns="0" rtlCol="0" anchor="ctr"/>
           <a:lstStyle/>
           <a:p>
-            <a:pPr algn="ctr" indent="0" marL="0">
-              <a:buNone/>
-            </a:pPr>
-            <a:r>
-              <a:rPr lang="en-US" sz="1600" b="1" dirty="0">
-                <a:solidFill>
-                  <a:schemeClr val="bg1"/>
-                </a:solidFill>
-              </a:rPr>
-              <a:t>2</a:t>
-            </a:r>
-            <a:endParaRPr lang="en-US" sz="1600" dirty="0"/>
-          </a:p>
-        </p:txBody>
-      </p:sp>
-      <p:sp>
-        <p:nvSpPr>
-          <p:cNvPr id="12" name="Text 9"/>
-          <p:cNvSpPr txBox="1"/>
-          <p:nvPr/>
-        </p:nvSpPr>
-        <p:spPr>
-          <a:xfrm>
-            <a:off x="5029200" y="2468880"/>
-            <a:ext cx="6583680" cy="548640"/>
-          </a:xfrm>
-          <a:prstGeom prst="rect">
-            <a:avLst/>
-          </a:prstGeom>
-          <a:noFill/>
-          <a:ln/>
-        </p:spPr>
-        <p:txBody>
-          <a:bodyPr wrap="square" lIns="0" tIns="0" rIns="0" bIns="0" rtlCol="0" anchor="ctr"/>
-          <a:lstStyle/>
-          <a:p>
             <a:pPr indent="0" marL="0">
               <a:buNone/>
             </a:pPr>
             <a:r>
-              <a:rPr lang="en-US" sz="1500" dirty="0">
+              <a:rPr lang="en-US" sz="1500" b="1" dirty="0">
                 <a:solidFill>
                   <a:schemeClr val="tx1"/>
                 </a:solidFill>
               </a:rPr>
-              <a:t>O utilizador escolhe Stripe ou PayPal e paga na página do serviço</a:t>
-            </a:r>
-            <a:endParaRPr lang="en-US" sz="1500" dirty="0"/>
-          </a:p>
-        </p:txBody>
-      </p:sp>
-      <p:sp>
-        <p:nvSpPr>
-          <p:cNvPr id="13" name="passo"/>
-          <p:cNvSpPr/>
-          <p:nvPr/>
-        </p:nvSpPr>
-        <p:spPr>
-          <a:xfrm>
-            <a:off x="4389120" y="3383280"/>
-            <a:ext cx="457200" cy="457200"/>
-          </a:xfrm>
-          <a:prstGeom prst="ellipse">
-            <a:avLst/>
-          </a:prstGeom>
-          <a:solidFill>
-            <a:schemeClr val="accent1"/>
-          </a:solidFill>
-          <a:ln w="12700">
-            <a:solidFill>
-              <a:schemeClr val="accent1"/>
-            </a:solidFill>
-            <a:prstDash val="solid"/>
-          </a:ln>
-        </p:spPr>
-      </p:sp>
-      <p:sp>
-        <p:nvSpPr>
-          <p:cNvPr id="14" name="Text 11"/>
-          <p:cNvSpPr txBox="1"/>
-          <p:nvPr/>
-        </p:nvSpPr>
-        <p:spPr>
-          <a:xfrm>
-            <a:off x="4389120" y="3383280"/>
-            <a:ext cx="457200" cy="457200"/>
-          </a:xfrm>
-          <a:prstGeom prst="rect">
-            <a:avLst/>
-          </a:prstGeom>
-          <a:noFill/>
-          <a:ln/>
-        </p:spPr>
-        <p:txBody>
-          <a:bodyPr wrap="square" lIns="0" tIns="0" rIns="0" bIns="0" rtlCol="0" anchor="ctr"/>
-          <a:lstStyle/>
-          <a:p>
-            <a:pPr algn="ctr" indent="0" marL="0">
-              <a:buNone/>
-            </a:pPr>
-            <a:r>
-              <a:rPr lang="en-US" sz="1600" b="1" dirty="0">
-                <a:solidFill>
-                  <a:schemeClr val="bg1"/>
-                </a:solidFill>
-              </a:rPr>
-              <a:t>3</a:t>
-            </a:r>
-            <a:endParaRPr lang="en-US" sz="1600" dirty="0"/>
-          </a:p>
-        </p:txBody>
-      </p:sp>
-      <p:sp>
-        <p:nvSpPr>
-          <p:cNvPr id="15" name="Text 12"/>
-          <p:cNvSpPr txBox="1"/>
-          <p:nvPr/>
-        </p:nvSpPr>
-        <p:spPr>
-          <a:xfrm>
-            <a:off x="5029200" y="3337560"/>
-            <a:ext cx="6583680" cy="548640"/>
-          </a:xfrm>
-          <a:prstGeom prst="rect">
-            <a:avLst/>
-          </a:prstGeom>
-          <a:noFill/>
-          <a:ln/>
-        </p:spPr>
-        <p:txBody>
-          <a:bodyPr wrap="square" lIns="0" tIns="0" rIns="0" bIns="0" rtlCol="0" anchor="ctr"/>
-          <a:lstStyle/>
-          <a:p>
+              <a:t>Também pesquisados: </a:t>
+            </a:r>
             <a:pPr indent="0" marL="0">
               <a:buNone/>
             </a:pPr>
@@ -8775,201 +9836,7 @@
                   <a:schemeClr val="tx1"/>
                 </a:solidFill>
               </a:rPr>
-              <a:t>Espera pelo resultado (US28 c); sem resposta no tempo limite, liberta a reserva</a:t>
-            </a:r>
-            <a:endParaRPr lang="en-US" sz="1500" dirty="0"/>
-          </a:p>
-        </p:txBody>
-      </p:sp>
-      <p:sp>
-        <p:nvSpPr>
-          <p:cNvPr id="16" name="passo"/>
-          <p:cNvSpPr/>
-          <p:nvPr/>
-        </p:nvSpPr>
-        <p:spPr>
-          <a:xfrm>
-            <a:off x="4389120" y="4251960"/>
-            <a:ext cx="457200" cy="457200"/>
-          </a:xfrm>
-          <a:prstGeom prst="ellipse">
-            <a:avLst/>
-          </a:prstGeom>
-          <a:solidFill>
-            <a:schemeClr val="accent1"/>
-          </a:solidFill>
-          <a:ln w="12700">
-            <a:solidFill>
-              <a:schemeClr val="accent1"/>
-            </a:solidFill>
-            <a:prstDash val="solid"/>
-          </a:ln>
-        </p:spPr>
-      </p:sp>
-      <p:sp>
-        <p:nvSpPr>
-          <p:cNvPr id="17" name="Text 14"/>
-          <p:cNvSpPr txBox="1"/>
-          <p:nvPr/>
-        </p:nvSpPr>
-        <p:spPr>
-          <a:xfrm>
-            <a:off x="4389120" y="4251960"/>
-            <a:ext cx="457200" cy="457200"/>
-          </a:xfrm>
-          <a:prstGeom prst="rect">
-            <a:avLst/>
-          </a:prstGeom>
-          <a:noFill/>
-          <a:ln/>
-        </p:spPr>
-        <p:txBody>
-          <a:bodyPr wrap="square" lIns="0" tIns="0" rIns="0" bIns="0" rtlCol="0" anchor="ctr"/>
-          <a:lstStyle/>
-          <a:p>
-            <a:pPr algn="ctr" indent="0" marL="0">
-              <a:buNone/>
-            </a:pPr>
-            <a:r>
-              <a:rPr lang="en-US" sz="1600" b="1" dirty="0">
-                <a:solidFill>
-                  <a:schemeClr val="bg1"/>
-                </a:solidFill>
-              </a:rPr>
-              <a:t>4</a:t>
-            </a:r>
-            <a:endParaRPr lang="en-US" sz="1600" dirty="0"/>
-          </a:p>
-        </p:txBody>
-      </p:sp>
-      <p:sp>
-        <p:nvSpPr>
-          <p:cNvPr id="18" name="Text 15"/>
-          <p:cNvSpPr txBox="1"/>
-          <p:nvPr/>
-        </p:nvSpPr>
-        <p:spPr>
-          <a:xfrm>
-            <a:off x="5029200" y="4206240"/>
-            <a:ext cx="6583680" cy="548640"/>
-          </a:xfrm>
-          <a:prstGeom prst="rect">
-            <a:avLst/>
-          </a:prstGeom>
-          <a:noFill/>
-          <a:ln/>
-        </p:spPr>
-        <p:txBody>
-          <a:bodyPr wrap="square" lIns="0" tIns="0" rIns="0" bIns="0" rtlCol="0" anchor="ctr"/>
-          <a:lstStyle/>
-          <a:p>
-            <a:pPr indent="0" marL="0">
-              <a:buNone/>
-            </a:pPr>
-            <a:r>
-              <a:rPr lang="en-US" sz="1500" dirty="0">
-                <a:solidFill>
-                  <a:schemeClr val="tx1"/>
-                </a:solidFill>
-              </a:rPr>
-              <a:t>Sucesso: emite a fatura; coleção e stock atualizados em paralelo (fork/join)</a:t>
-            </a:r>
-            <a:endParaRPr lang="en-US" sz="1500" dirty="0"/>
-          </a:p>
-        </p:txBody>
-      </p:sp>
-      <p:sp>
-        <p:nvSpPr>
-          <p:cNvPr id="19" name="passo"/>
-          <p:cNvSpPr/>
-          <p:nvPr/>
-        </p:nvSpPr>
-        <p:spPr>
-          <a:xfrm>
-            <a:off x="4389120" y="5120640"/>
-            <a:ext cx="457200" cy="457200"/>
-          </a:xfrm>
-          <a:prstGeom prst="ellipse">
-            <a:avLst/>
-          </a:prstGeom>
-          <a:solidFill>
-            <a:schemeClr val="accent1"/>
-          </a:solidFill>
-          <a:ln w="12700">
-            <a:solidFill>
-              <a:schemeClr val="accent1"/>
-            </a:solidFill>
-            <a:prstDash val="solid"/>
-          </a:ln>
-        </p:spPr>
-      </p:sp>
-      <p:sp>
-        <p:nvSpPr>
-          <p:cNvPr id="20" name="Text 17"/>
-          <p:cNvSpPr txBox="1"/>
-          <p:nvPr/>
-        </p:nvSpPr>
-        <p:spPr>
-          <a:xfrm>
-            <a:off x="4389120" y="5120640"/>
-            <a:ext cx="457200" cy="457200"/>
-          </a:xfrm>
-          <a:prstGeom prst="rect">
-            <a:avLst/>
-          </a:prstGeom>
-          <a:noFill/>
-          <a:ln/>
-        </p:spPr>
-        <p:txBody>
-          <a:bodyPr wrap="square" lIns="0" tIns="0" rIns="0" bIns="0" rtlCol="0" anchor="ctr"/>
-          <a:lstStyle/>
-          <a:p>
-            <a:pPr algn="ctr" indent="0" marL="0">
-              <a:buNone/>
-            </a:pPr>
-            <a:r>
-              <a:rPr lang="en-US" sz="1600" b="1" dirty="0">
-                <a:solidFill>
-                  <a:schemeClr val="bg1"/>
-                </a:solidFill>
-              </a:rPr>
-              <a:t>5</a:t>
-            </a:r>
-            <a:endParaRPr lang="en-US" sz="1600" dirty="0"/>
-          </a:p>
-        </p:txBody>
-      </p:sp>
-      <p:sp>
-        <p:nvSpPr>
-          <p:cNvPr id="21" name="Text 18"/>
-          <p:cNvSpPr txBox="1"/>
-          <p:nvPr/>
-        </p:nvSpPr>
-        <p:spPr>
-          <a:xfrm>
-            <a:off x="5029200" y="5074920"/>
-            <a:ext cx="6583680" cy="548640"/>
-          </a:xfrm>
-          <a:prstGeom prst="rect">
-            <a:avLst/>
-          </a:prstGeom>
-          <a:noFill/>
-          <a:ln/>
-        </p:spPr>
-        <p:txBody>
-          <a:bodyPr wrap="square" lIns="0" tIns="0" rIns="0" bIns="0" rtlCol="0" anchor="ctr"/>
-          <a:lstStyle/>
-          <a:p>
-            <a:pPr indent="0" marL="0">
-              <a:buNone/>
-            </a:pPr>
-            <a:r>
-              <a:rPr lang="en-US" sz="1500" dirty="0">
-                <a:solidFill>
-                  <a:schemeClr val="tx1"/>
-                </a:solidFill>
-              </a:rPr>
-              <a:t>Falha: tentar com outro serviço ou cancelar (US28 g)</a:t>
+              <a:t>imagens de capa no Cloudinary, com sugestão do Cover Art Archive pelo MBID; faixas e canções importadas da API do MusicBrainz (dados CC0).</a:t>
             </a:r>
             <a:endParaRPr lang="en-US" sz="1500" dirty="0"/>
           </a:p>
@@ -9077,7 +9944,7 @@
                   <a:schemeClr val="tx1"/>
                 </a:solidFill>
               </a:rPr>
-              <a:t>Pedido de nova versão: três atores</a:t>
+              <a:t>Fluxo de compra: o pagamento</a:t>
             </a:r>
             <a:endParaRPr lang="en-US" sz="3200" dirty="0"/>
           </a:p>
@@ -9171,7 +10038,7 @@
       </p:sp>
       <p:pic>
         <p:nvPicPr>
-          <p:cNvPr id="6" name="diagrama-pedido" descr="C:\Users\rodri\Desktop\PGP\etapa1\atividades\img\02-pedido-nova-versao.png">    </p:cNvPr>
+          <p:cNvPr id="6" name="diagrama-pagar" descr="C:\Users\rodri\Desktop\PGP\etapa1\atividades\img\01-1-pagar.png">    </p:cNvPr>
           <p:cNvPicPr>
             <a:picLocks noChangeAspect="1"/>
           </p:cNvPicPr>
@@ -9185,8 +10052,8 @@
         </p:blipFill>
         <p:spPr>
           <a:xfrm>
-            <a:off x="589844" y="1280160"/>
-            <a:ext cx="3575193" cy="5074920"/>
+            <a:off x="573534" y="1280160"/>
+            <a:ext cx="3242052" cy="5074920"/>
           </a:xfrm>
           <a:prstGeom prst="rect">
             <a:avLst/>
@@ -9208,7 +10075,7 @@
         </p:nvSpPr>
         <p:spPr>
           <a:xfrm>
-            <a:off x="4663440" y="1737360"/>
+            <a:off x="4389120" y="1645920"/>
             <a:ext cx="457200" cy="457200"/>
           </a:xfrm>
           <a:prstGeom prst="ellipse">
@@ -9233,7 +10100,7 @@
         </p:nvSpPr>
         <p:spPr>
           <a:xfrm>
-            <a:off x="4663440" y="1737360"/>
+            <a:off x="4389120" y="1645920"/>
             <a:ext cx="457200" cy="457200"/>
           </a:xfrm>
           <a:prstGeom prst="rect">
@@ -9269,8 +10136,8 @@
         </p:nvSpPr>
         <p:spPr>
           <a:xfrm>
-            <a:off x="5303520" y="1691640"/>
-            <a:ext cx="6309360" cy="548640"/>
+            <a:off x="5029200" y="1600200"/>
+            <a:ext cx="6583680" cy="548640"/>
           </a:xfrm>
           <a:prstGeom prst="rect">
             <a:avLst/>
@@ -9291,7 +10158,7 @@
                   <a:schemeClr val="tx1"/>
                 </a:solidFill>
               </a:rPr>
-              <a:t>O utilizador pede uma versão nova de um álbum (US12)</a:t>
+              <a:t>Reserva as unidades; se uma versão esgotou entretanto, sai do carrinho</a:t>
             </a:r>
             <a:endParaRPr lang="en-US" sz="1500" dirty="0"/>
           </a:p>
@@ -9305,7 +10172,7 @@
         </p:nvSpPr>
         <p:spPr>
           <a:xfrm>
-            <a:off x="4663440" y="2788920"/>
+            <a:off x="4389120" y="2514600"/>
             <a:ext cx="457200" cy="457200"/>
           </a:xfrm>
           <a:prstGeom prst="ellipse">
@@ -9330,7 +10197,7 @@
         </p:nvSpPr>
         <p:spPr>
           <a:xfrm>
-            <a:off x="4663440" y="2788920"/>
+            <a:off x="4389120" y="2514600"/>
             <a:ext cx="457200" cy="457200"/>
           </a:xfrm>
           <a:prstGeom prst="rect">
@@ -9366,8 +10233,8 @@
         </p:nvSpPr>
         <p:spPr>
           <a:xfrm>
-            <a:off x="5303520" y="2743200"/>
-            <a:ext cx="6309360" cy="548640"/>
+            <a:off x="5029200" y="2468880"/>
+            <a:ext cx="6583680" cy="548640"/>
           </a:xfrm>
           <a:prstGeom prst="rect">
             <a:avLst/>
@@ -9388,7 +10255,7 @@
                   <a:schemeClr val="tx1"/>
                 </a:solidFill>
               </a:rPr>
-              <a:t>O pedido fica "em análise" até o gestor decidir</a:t>
+              <a:t>O utilizador escolhe Stripe ou PayPal e paga na página do serviço</a:t>
             </a:r>
             <a:endParaRPr lang="en-US" sz="1500" dirty="0"/>
           </a:p>
@@ -9402,7 +10269,7 @@
         </p:nvSpPr>
         <p:spPr>
           <a:xfrm>
-            <a:off x="4663440" y="3840480"/>
+            <a:off x="4389120" y="3383280"/>
             <a:ext cx="457200" cy="457200"/>
           </a:xfrm>
           <a:prstGeom prst="ellipse">
@@ -9427,7 +10294,7 @@
         </p:nvSpPr>
         <p:spPr>
           <a:xfrm>
-            <a:off x="4663440" y="3840480"/>
+            <a:off x="4389120" y="3383280"/>
             <a:ext cx="457200" cy="457200"/>
           </a:xfrm>
           <a:prstGeom prst="rect">
@@ -9463,8 +10330,8 @@
         </p:nvSpPr>
         <p:spPr>
           <a:xfrm>
-            <a:off x="5303520" y="3794760"/>
-            <a:ext cx="6309360" cy="548640"/>
+            <a:off x="5029200" y="3337560"/>
+            <a:ext cx="6583680" cy="548640"/>
           </a:xfrm>
           <a:prstGeom prst="rect">
             <a:avLst/>
@@ -9485,7 +10352,7 @@
                   <a:schemeClr val="tx1"/>
                 </a:solidFill>
               </a:rPr>
-              <a:t>O gestor aceita (a versão é criada) ou recusa (US24)</a:t>
+              <a:t>Espera pelo resultado (US28 c); sem resposta no tempo limite, liberta a reserva</a:t>
             </a:r>
             <a:endParaRPr lang="en-US" sz="1500" dirty="0"/>
           </a:p>
@@ -9499,7 +10366,7 @@
         </p:nvSpPr>
         <p:spPr>
           <a:xfrm>
-            <a:off x="4663440" y="4892040"/>
+            <a:off x="4389120" y="4251960"/>
             <a:ext cx="457200" cy="457200"/>
           </a:xfrm>
           <a:prstGeom prst="ellipse">
@@ -9524,7 +10391,7 @@
         </p:nvSpPr>
         <p:spPr>
           <a:xfrm>
-            <a:off x="4663440" y="4892040"/>
+            <a:off x="4389120" y="4251960"/>
             <a:ext cx="457200" cy="457200"/>
           </a:xfrm>
           <a:prstGeom prst="rect">
@@ -9560,8 +10427,8 @@
         </p:nvSpPr>
         <p:spPr>
           <a:xfrm>
-            <a:off x="5303520" y="4846320"/>
-            <a:ext cx="6309360" cy="548640"/>
+            <a:off x="5029200" y="4206240"/>
+            <a:ext cx="6583680" cy="548640"/>
           </a:xfrm>
           <a:prstGeom prst="rect">
             <a:avLst/>
@@ -9582,7 +10449,104 @@
                   <a:schemeClr val="tx1"/>
                 </a:solidFill>
               </a:rPr>
-              <a:t>O utilizador recebe uma notificação no dashboard (US14)</a:t>
+              <a:t>Sucesso: emite a fatura; coleção e stock atualizados em paralelo (fork/join)</a:t>
+            </a:r>
+            <a:endParaRPr lang="en-US" sz="1500" dirty="0"/>
+          </a:p>
+        </p:txBody>
+      </p:sp>
+      <p:sp>
+        <p:nvSpPr>
+          <p:cNvPr id="19" name="passo"/>
+          <p:cNvSpPr/>
+          <p:nvPr/>
+        </p:nvSpPr>
+        <p:spPr>
+          <a:xfrm>
+            <a:off x="4389120" y="5120640"/>
+            <a:ext cx="457200" cy="457200"/>
+          </a:xfrm>
+          <a:prstGeom prst="ellipse">
+            <a:avLst/>
+          </a:prstGeom>
+          <a:solidFill>
+            <a:schemeClr val="accent1"/>
+          </a:solidFill>
+          <a:ln w="12700">
+            <a:solidFill>
+              <a:schemeClr val="accent1"/>
+            </a:solidFill>
+            <a:prstDash val="solid"/>
+          </a:ln>
+        </p:spPr>
+      </p:sp>
+      <p:sp>
+        <p:nvSpPr>
+          <p:cNvPr id="20" name="Text 17"/>
+          <p:cNvSpPr txBox="1"/>
+          <p:nvPr/>
+        </p:nvSpPr>
+        <p:spPr>
+          <a:xfrm>
+            <a:off x="4389120" y="5120640"/>
+            <a:ext cx="457200" cy="457200"/>
+          </a:xfrm>
+          <a:prstGeom prst="rect">
+            <a:avLst/>
+          </a:prstGeom>
+          <a:noFill/>
+          <a:ln/>
+        </p:spPr>
+        <p:txBody>
+          <a:bodyPr wrap="square" lIns="0" tIns="0" rIns="0" bIns="0" rtlCol="0" anchor="ctr"/>
+          <a:lstStyle/>
+          <a:p>
+            <a:pPr algn="ctr" indent="0" marL="0">
+              <a:buNone/>
+            </a:pPr>
+            <a:r>
+              <a:rPr lang="en-US" sz="1600" b="1" dirty="0">
+                <a:solidFill>
+                  <a:schemeClr val="bg1"/>
+                </a:solidFill>
+              </a:rPr>
+              <a:t>5</a:t>
+            </a:r>
+            <a:endParaRPr lang="en-US" sz="1600" dirty="0"/>
+          </a:p>
+        </p:txBody>
+      </p:sp>
+      <p:sp>
+        <p:nvSpPr>
+          <p:cNvPr id="21" name="Text 18"/>
+          <p:cNvSpPr txBox="1"/>
+          <p:nvPr/>
+        </p:nvSpPr>
+        <p:spPr>
+          <a:xfrm>
+            <a:off x="5029200" y="5074920"/>
+            <a:ext cx="6583680" cy="548640"/>
+          </a:xfrm>
+          <a:prstGeom prst="rect">
+            <a:avLst/>
+          </a:prstGeom>
+          <a:noFill/>
+          <a:ln/>
+        </p:spPr>
+        <p:txBody>
+          <a:bodyPr wrap="square" lIns="0" tIns="0" rIns="0" bIns="0" rtlCol="0" anchor="ctr"/>
+          <a:lstStyle/>
+          <a:p>
+            <a:pPr indent="0" marL="0">
+              <a:buNone/>
+            </a:pPr>
+            <a:r>
+              <a:rPr lang="en-US" sz="1500" dirty="0">
+                <a:solidFill>
+                  <a:schemeClr val="tx1"/>
+                </a:solidFill>
+              </a:rPr>
+              <a:t>Falha: tentar com outro serviço ou cancelar (US28 g)</a:t>
             </a:r>
             <a:endParaRPr lang="en-US" sz="1500" dirty="0"/>
           </a:p>
